--- a/presentation/쉐어택_발표_v3.pptx
+++ b/presentation/쉐어택_발표_v3.pptx
@@ -2494,13 +2494,6 @@
             </a:solidFill>
             <a:prstDash val="solid"/>
           </a:ln>
-          <a:effectLst>
-            <a:outerShdw sx="100000" sy="100000" kx="0" ky="0" algn="bl" rotWithShape="0" blurRad="101600" dist="50800" dir="5400000">
-              <a:srgbClr val="000000">
-                <a:alpha val="75000"/>
-              </a:srgbClr>
-            </a:outerShdw>
-          </a:effectLst>
         </p:spPr>
       </p:sp>
       <p:sp>
@@ -2645,13 +2638,6 @@
             </a:solidFill>
             <a:prstDash val="solid"/>
           </a:ln>
-          <a:effectLst>
-            <a:outerShdw sx="100000" sy="100000" kx="0" ky="0" algn="bl" rotWithShape="0" blurRad="101600" dist="50800" dir="5400000">
-              <a:srgbClr val="000000">
-                <a:alpha val="75000"/>
-              </a:srgbClr>
-            </a:outerShdw>
-          </a:effectLst>
         </p:spPr>
       </p:sp>
       <p:sp>
@@ -2813,13 +2799,6 @@
             </a:solidFill>
             <a:prstDash val="solid"/>
           </a:ln>
-          <a:effectLst>
-            <a:outerShdw sx="100000" sy="100000" kx="0" ky="0" algn="bl" rotWithShape="0" blurRad="101600" dist="50800" dir="5400000">
-              <a:srgbClr val="000000">
-                <a:alpha val="75000"/>
-              </a:srgbClr>
-            </a:outerShdw>
-          </a:effectLst>
         </p:spPr>
       </p:sp>
       <p:sp>
@@ -3020,13 +2999,6 @@
             </a:solidFill>
             <a:prstDash val="solid"/>
           </a:ln>
-          <a:effectLst>
-            <a:outerShdw sx="100000" sy="100000" kx="0" ky="0" algn="bl" rotWithShape="0" blurRad="101600" dist="50800" dir="5400000">
-              <a:srgbClr val="000000">
-                <a:alpha val="75000"/>
-              </a:srgbClr>
-            </a:outerShdw>
-          </a:effectLst>
         </p:spPr>
       </p:sp>
       <p:sp>
@@ -3615,13 +3587,6 @@
             </a:solidFill>
             <a:prstDash val="solid"/>
           </a:ln>
-          <a:effectLst>
-            <a:outerShdw sx="100000" sy="100000" kx="0" ky="0" algn="bl" rotWithShape="0" blurRad="101600" dist="50800" dir="5400000">
-              <a:srgbClr val="000000">
-                <a:alpha val="75000"/>
-              </a:srgbClr>
-            </a:outerShdw>
-          </a:effectLst>
         </p:spPr>
       </p:sp>
       <p:sp>
@@ -3766,13 +3731,6 @@
             </a:solidFill>
             <a:prstDash val="solid"/>
           </a:ln>
-          <a:effectLst>
-            <a:outerShdw sx="100000" sy="100000" kx="0" ky="0" algn="bl" rotWithShape="0" blurRad="101600" dist="50800" dir="5400000">
-              <a:srgbClr val="000000">
-                <a:alpha val="75000"/>
-              </a:srgbClr>
-            </a:outerShdw>
-          </a:effectLst>
         </p:spPr>
       </p:sp>
       <p:sp>
@@ -3966,8 +3924,8 @@
         </p:nvSpPr>
         <p:spPr>
           <a:xfrm>
-            <a:off x="777240" y="2852928"/>
-            <a:ext cx="5029200" cy="777240"/>
+            <a:off x="777240" y="2834640"/>
+            <a:ext cx="5029200" cy="822960"/>
           </a:xfrm>
           <a:prstGeom prst="rect">
             <a:avLst/>
@@ -3984,7 +3942,7 @@
               <a:buChar char="•"/>
             </a:pPr>
             <a:r>
-              <a:rPr lang="ko-KR" altLang="en-US" sz="1250" dirty="0">
+              <a:rPr lang="ko-KR" altLang="en-US" sz="1400" dirty="0">
                 <a:solidFill>
                   <a:srgbClr val="000000"/>
                 </a:solidFill>
@@ -3994,7 +3952,7 @@
               </a:rPr>
               <a:t>😣 35% 할증, 막차 끊기면 대안 없음</a:t>
             </a:r>
-            <a:endParaRPr lang="ko-KR" altLang="en-US" sz="1250" dirty="0"/>
+            <a:endParaRPr lang="ko-KR" altLang="en-US" sz="1400" dirty="0"/>
           </a:p>
           <a:p>
             <a:pPr eaLnBrk="0" latinLnBrk="0" marL="342900" indent="-342900">
@@ -4002,7 +3960,7 @@
               <a:buChar char="•"/>
             </a:pPr>
             <a:r>
-              <a:rPr lang="ko-KR" altLang="en-US" sz="1250" dirty="0">
+              <a:rPr lang="ko-KR" altLang="en-US" sz="1400" dirty="0">
                 <a:solidFill>
                   <a:srgbClr val="000000"/>
                 </a:solidFill>
@@ -4012,7 +3970,7 @@
               </a:rPr>
               <a:t>😶 혼자 타기 부담, 같은 방향 사람을 못 찾음</a:t>
             </a:r>
-            <a:endParaRPr lang="ko-KR" altLang="en-US" sz="1250" dirty="0"/>
+            <a:endParaRPr lang="ko-KR" altLang="en-US" sz="1400" dirty="0"/>
           </a:p>
         </p:txBody>
       </p:sp>
@@ -4041,13 +3999,6 @@
             </a:solidFill>
             <a:prstDash val="solid"/>
           </a:ln>
-          <a:effectLst>
-            <a:outerShdw sx="100000" sy="100000" kx="0" ky="0" algn="bl" rotWithShape="0" blurRad="101600" dist="50800" dir="5400000">
-              <a:srgbClr val="000000">
-                <a:alpha val="75000"/>
-              </a:srgbClr>
-            </a:outerShdw>
-          </a:effectLst>
         </p:spPr>
       </p:sp>
       <p:sp>
@@ -4241,8 +4192,8 @@
         </p:nvSpPr>
         <p:spPr>
           <a:xfrm>
-            <a:off x="6473952" y="2852928"/>
-            <a:ext cx="5029200" cy="777240"/>
+            <a:off x="6473952" y="2834640"/>
+            <a:ext cx="5029200" cy="822960"/>
           </a:xfrm>
           <a:prstGeom prst="rect">
             <a:avLst/>
@@ -4259,7 +4210,7 @@
               <a:buChar char="•"/>
             </a:pPr>
             <a:r>
-              <a:rPr lang="ko-KR" altLang="en-US" sz="1250" dirty="0">
+              <a:rPr lang="ko-KR" altLang="en-US" sz="1400" dirty="0">
                 <a:solidFill>
                   <a:srgbClr val="000000"/>
                 </a:solidFill>
@@ -4269,7 +4220,7 @@
               </a:rPr>
               <a:t>🛣️ 읍·면 하차 후 빈 차 귀로 = 연료·시간 손해</a:t>
             </a:r>
-            <a:endParaRPr lang="ko-KR" altLang="en-US" sz="1250" dirty="0"/>
+            <a:endParaRPr lang="ko-KR" altLang="en-US" sz="1400" dirty="0"/>
           </a:p>
           <a:p>
             <a:pPr eaLnBrk="0" latinLnBrk="0" marL="342900" indent="-342900">
@@ -4277,7 +4228,7 @@
               <a:buChar char="•"/>
             </a:pPr>
             <a:r>
-              <a:rPr lang="ko-KR" altLang="en-US" sz="1250" dirty="0">
+              <a:rPr lang="ko-KR" altLang="en-US" sz="1400" dirty="0">
                 <a:solidFill>
                   <a:srgbClr val="000000"/>
                 </a:solidFill>
@@ -4287,7 +4238,7 @@
               </a:rPr>
               <a:t>📱 호출 앱 수수료는 그대로</a:t>
             </a:r>
-            <a:endParaRPr lang="ko-KR" altLang="en-US" sz="1250" dirty="0"/>
+            <a:endParaRPr lang="ko-KR" altLang="en-US" sz="1400" dirty="0"/>
           </a:p>
         </p:txBody>
       </p:sp>
@@ -4316,13 +4267,6 @@
             </a:solidFill>
             <a:prstDash val="solid"/>
           </a:ln>
-          <a:effectLst>
-            <a:outerShdw sx="100000" sy="100000" kx="0" ky="0" algn="bl" rotWithShape="0" blurRad="101600" dist="50800" dir="5400000">
-              <a:srgbClr val="000000">
-                <a:alpha val="75000"/>
-              </a:srgbClr>
-            </a:outerShdw>
-          </a:effectLst>
         </p:spPr>
       </p:sp>
       <p:sp>
@@ -5154,13 +5098,6 @@
             </a:solidFill>
             <a:prstDash val="solid"/>
           </a:ln>
-          <a:effectLst>
-            <a:outerShdw sx="100000" sy="100000" kx="0" ky="0" algn="bl" rotWithShape="0" blurRad="101600" dist="50800" dir="5400000">
-              <a:srgbClr val="000000">
-                <a:alpha val="75000"/>
-              </a:srgbClr>
-            </a:outerShdw>
-          </a:effectLst>
         </p:spPr>
       </p:sp>
       <p:sp>
@@ -5274,7 +5211,7 @@
                 <a:ea typeface="Malgun Gothic" pitchFamily="34" charset="-122"/>
                 <a:cs typeface="Malgun Gothic" pitchFamily="34" charset="-120"/>
               </a:rPr>
-              <a:t>손님이 없는 게 아니라 빈 차와 손님이 엇갈린다</a:t>
+              <a:t>손님이 없는 게 아니라 엇갈린다 · 9/28 개편은 같은 읍·면 안만 풀어 시내↔오송·오창은 그대로</a:t>
             </a:r>
             <a:endParaRPr lang="ko-KR" altLang="en-US" sz="1500" dirty="0"/>
           </a:p>
@@ -5305,13 +5242,6 @@
             </a:solidFill>
             <a:prstDash val="solid"/>
           </a:ln>
-          <a:effectLst>
-            <a:outerShdw sx="100000" sy="100000" kx="0" ky="0" algn="bl" rotWithShape="0" blurRad="101600" dist="50800" dir="5400000">
-              <a:srgbClr val="000000">
-                <a:alpha val="75000"/>
-              </a:srgbClr>
-            </a:outerShdw>
-          </a:effectLst>
         </p:spPr>
       </p:sp>
       <p:sp>
@@ -5786,13 +5716,6 @@
             </a:solidFill>
             <a:prstDash val="solid"/>
           </a:ln>
-          <a:effectLst>
-            <a:outerShdw sx="100000" sy="100000" kx="0" ky="0" algn="bl" rotWithShape="0" blurRad="101600" dist="50800" dir="5400000">
-              <a:srgbClr val="000000">
-                <a:alpha val="75000"/>
-              </a:srgbClr>
-            </a:outerShdw>
-          </a:effectLst>
         </p:spPr>
       </p:sp>
       <p:pic>
@@ -5926,13 +5849,6 @@
             </a:solidFill>
             <a:prstDash val="solid"/>
           </a:ln>
-          <a:effectLst>
-            <a:outerShdw sx="100000" sy="100000" kx="0" ky="0" algn="bl" rotWithShape="0" blurRad="101600" dist="50800" dir="5400000">
-              <a:srgbClr val="000000">
-                <a:alpha val="75000"/>
-              </a:srgbClr>
-            </a:outerShdw>
-          </a:effectLst>
         </p:spPr>
       </p:sp>
       <p:graphicFrame>
@@ -6064,13 +5980,6 @@
             </a:solidFill>
             <a:prstDash val="solid"/>
           </a:ln>
-          <a:effectLst>
-            <a:outerShdw sx="100000" sy="100000" kx="0" ky="0" algn="bl" rotWithShape="0" blurRad="101600" dist="50800" dir="5400000">
-              <a:srgbClr val="000000">
-                <a:alpha val="75000"/>
-              </a:srgbClr>
-            </a:outerShdw>
-          </a:effectLst>
         </p:spPr>
       </p:sp>
       <p:sp>
@@ -6215,13 +6124,6 @@
             </a:solidFill>
             <a:prstDash val="solid"/>
           </a:ln>
-          <a:effectLst>
-            <a:outerShdw sx="100000" sy="100000" kx="0" ky="0" algn="bl" rotWithShape="0" blurRad="101600" dist="50800" dir="5400000">
-              <a:srgbClr val="000000">
-                <a:alpha val="75000"/>
-              </a:srgbClr>
-            </a:outerShdw>
-          </a:effectLst>
         </p:spPr>
       </p:sp>
       <p:sp>
@@ -6288,13 +6190,6 @@
             </a:solidFill>
             <a:prstDash val="solid"/>
           </a:ln>
-          <a:effectLst>
-            <a:outerShdw sx="100000" sy="100000" kx="0" ky="0" algn="bl" rotWithShape="0" blurRad="101600" dist="50800" dir="5400000">
-              <a:srgbClr val="000000">
-                <a:alpha val="75000"/>
-              </a:srgbClr>
-            </a:outerShdw>
-          </a:effectLst>
         </p:spPr>
       </p:sp>
       <p:sp>
@@ -6361,13 +6256,6 @@
             </a:solidFill>
             <a:prstDash val="solid"/>
           </a:ln>
-          <a:effectLst>
-            <a:outerShdw sx="100000" sy="100000" kx="0" ky="0" algn="bl" rotWithShape="0" blurRad="101600" dist="50800" dir="5400000">
-              <a:srgbClr val="000000">
-                <a:alpha val="75000"/>
-              </a:srgbClr>
-            </a:outerShdw>
-          </a:effectLst>
         </p:spPr>
       </p:sp>
       <p:sp>
@@ -6434,13 +6322,6 @@
             </a:solidFill>
             <a:prstDash val="solid"/>
           </a:ln>
-          <a:effectLst>
-            <a:outerShdw sx="100000" sy="100000" kx="0" ky="0" algn="bl" rotWithShape="0" blurRad="101600" dist="50800" dir="5400000">
-              <a:srgbClr val="000000">
-                <a:alpha val="75000"/>
-              </a:srgbClr>
-            </a:outerShdw>
-          </a:effectLst>
         </p:spPr>
       </p:sp>
       <p:sp>
@@ -6507,13 +6388,6 @@
             </a:solidFill>
             <a:prstDash val="solid"/>
           </a:ln>
-          <a:effectLst>
-            <a:outerShdw sx="100000" sy="100000" kx="0" ky="0" algn="bl" rotWithShape="0" blurRad="101600" dist="50800" dir="5400000">
-              <a:srgbClr val="000000">
-                <a:alpha val="75000"/>
-              </a:srgbClr>
-            </a:outerShdw>
-          </a:effectLst>
         </p:spPr>
       </p:sp>
       <p:sp>
@@ -6580,13 +6454,6 @@
             </a:solidFill>
             <a:prstDash val="solid"/>
           </a:ln>
-          <a:effectLst>
-            <a:outerShdw sx="100000" sy="100000" kx="0" ky="0" algn="bl" rotWithShape="0" blurRad="101600" dist="50800" dir="5400000">
-              <a:srgbClr val="000000">
-                <a:alpha val="75000"/>
-              </a:srgbClr>
-            </a:outerShdw>
-          </a:effectLst>
         </p:spPr>
       </p:sp>
       <p:sp>
@@ -6653,13 +6520,6 @@
             </a:solidFill>
             <a:prstDash val="solid"/>
           </a:ln>
-          <a:effectLst>
-            <a:outerShdw sx="100000" sy="100000" kx="0" ky="0" algn="bl" rotWithShape="0" blurRad="101600" dist="50800" dir="5400000">
-              <a:srgbClr val="000000">
-                <a:alpha val="75000"/>
-              </a:srgbClr>
-            </a:outerShdw>
-          </a:effectLst>
         </p:spPr>
       </p:sp>
       <p:sp>
@@ -6726,13 +6586,6 @@
             </a:solidFill>
             <a:prstDash val="solid"/>
           </a:ln>
-          <a:effectLst>
-            <a:outerShdw sx="100000" sy="100000" kx="0" ky="0" algn="bl" rotWithShape="0" blurRad="101600" dist="50800" dir="5400000">
-              <a:srgbClr val="000000">
-                <a:alpha val="75000"/>
-              </a:srgbClr>
-            </a:outerShdw>
-          </a:effectLst>
         </p:spPr>
       </p:sp>
       <p:sp>
@@ -6799,13 +6652,6 @@
             </a:solidFill>
             <a:prstDash val="solid"/>
           </a:ln>
-          <a:effectLst>
-            <a:outerShdw sx="100000" sy="100000" kx="0" ky="0" algn="bl" rotWithShape="0" blurRad="101600" dist="50800" dir="5400000">
-              <a:srgbClr val="000000">
-                <a:alpha val="75000"/>
-              </a:srgbClr>
-            </a:outerShdw>
-          </a:effectLst>
         </p:spPr>
       </p:sp>
       <p:sp>
@@ -6872,13 +6718,6 @@
             </a:solidFill>
             <a:prstDash val="solid"/>
           </a:ln>
-          <a:effectLst>
-            <a:outerShdw sx="100000" sy="100000" kx="0" ky="0" algn="bl" rotWithShape="0" blurRad="101600" dist="50800" dir="5400000">
-              <a:srgbClr val="000000">
-                <a:alpha val="75000"/>
-              </a:srgbClr>
-            </a:outerShdw>
-          </a:effectLst>
         </p:spPr>
       </p:sp>
       <p:sp>
@@ -6945,13 +6784,6 @@
             </a:solidFill>
             <a:prstDash val="solid"/>
           </a:ln>
-          <a:effectLst>
-            <a:outerShdw sx="100000" sy="100000" kx="0" ky="0" algn="bl" rotWithShape="0" blurRad="101600" dist="50800" dir="5400000">
-              <a:srgbClr val="000000">
-                <a:alpha val="75000"/>
-              </a:srgbClr>
-            </a:outerShdw>
-          </a:effectLst>
         </p:spPr>
       </p:sp>
       <p:sp>
@@ -7018,13 +6850,6 @@
             </a:solidFill>
             <a:prstDash val="solid"/>
           </a:ln>
-          <a:effectLst>
-            <a:outerShdw sx="100000" sy="100000" kx="0" ky="0" algn="bl" rotWithShape="0" blurRad="101600" dist="50800" dir="5400000">
-              <a:srgbClr val="000000">
-                <a:alpha val="75000"/>
-              </a:srgbClr>
-            </a:outerShdw>
-          </a:effectLst>
         </p:spPr>
       </p:sp>
       <p:sp>
@@ -7091,13 +6916,6 @@
             </a:solidFill>
             <a:prstDash val="solid"/>
           </a:ln>
-          <a:effectLst>
-            <a:outerShdw sx="100000" sy="100000" kx="0" ky="0" algn="bl" rotWithShape="0" blurRad="101600" dist="50800" dir="5400000">
-              <a:srgbClr val="000000">
-                <a:alpha val="75000"/>
-              </a:srgbClr>
-            </a:outerShdw>
-          </a:effectLst>
         </p:spPr>
       </p:sp>
       <p:sp>
@@ -7164,13 +6982,6 @@
             </a:solidFill>
             <a:prstDash val="solid"/>
           </a:ln>
-          <a:effectLst>
-            <a:outerShdw sx="100000" sy="100000" kx="0" ky="0" algn="bl" rotWithShape="0" blurRad="101600" dist="50800" dir="5400000">
-              <a:srgbClr val="000000">
-                <a:alpha val="75000"/>
-              </a:srgbClr>
-            </a:outerShdw>
-          </a:effectLst>
         </p:spPr>
       </p:sp>
       <p:sp>
@@ -7237,13 +7048,6 @@
             </a:solidFill>
             <a:prstDash val="solid"/>
           </a:ln>
-          <a:effectLst>
-            <a:outerShdw sx="100000" sy="100000" kx="0" ky="0" algn="bl" rotWithShape="0" blurRad="101600" dist="50800" dir="5400000">
-              <a:srgbClr val="000000">
-                <a:alpha val="75000"/>
-              </a:srgbClr>
-            </a:outerShdw>
-          </a:effectLst>
         </p:spPr>
       </p:sp>
       <p:sp>
@@ -7310,13 +7114,6 @@
             </a:solidFill>
             <a:prstDash val="solid"/>
           </a:ln>
-          <a:effectLst>
-            <a:outerShdw sx="100000" sy="100000" kx="0" ky="0" algn="bl" rotWithShape="0" blurRad="101600" dist="50800" dir="5400000">
-              <a:srgbClr val="000000">
-                <a:alpha val="75000"/>
-              </a:srgbClr>
-            </a:outerShdw>
-          </a:effectLst>
         </p:spPr>
       </p:sp>
       <p:sp>
@@ -7400,13 +7197,6 @@
             </a:solidFill>
             <a:prstDash val="solid"/>
           </a:ln>
-          <a:effectLst>
-            <a:outerShdw sx="100000" sy="100000" kx="0" ky="0" algn="bl" rotWithShape="0" blurRad="101600" dist="50800" dir="5400000">
-              <a:srgbClr val="000000">
-                <a:alpha val="75000"/>
-              </a:srgbClr>
-            </a:outerShdw>
-          </a:effectLst>
         </p:spPr>
       </p:sp>
       <p:sp>
@@ -7473,13 +7263,6 @@
             </a:solidFill>
             <a:prstDash val="solid"/>
           </a:ln>
-          <a:effectLst>
-            <a:outerShdw sx="100000" sy="100000" kx="0" ky="0" algn="bl" rotWithShape="0" blurRad="101600" dist="50800" dir="5400000">
-              <a:srgbClr val="000000">
-                <a:alpha val="75000"/>
-              </a:srgbClr>
-            </a:outerShdw>
-          </a:effectLst>
         </p:spPr>
       </p:sp>
       <p:sp>
@@ -7546,13 +7329,6 @@
             </a:solidFill>
             <a:prstDash val="solid"/>
           </a:ln>
-          <a:effectLst>
-            <a:outerShdw sx="100000" sy="100000" kx="0" ky="0" algn="bl" rotWithShape="0" blurRad="101600" dist="50800" dir="5400000">
-              <a:srgbClr val="000000">
-                <a:alpha val="75000"/>
-              </a:srgbClr>
-            </a:outerShdw>
-          </a:effectLst>
         </p:spPr>
       </p:sp>
       <p:sp>
@@ -7619,13 +7395,6 @@
             </a:solidFill>
             <a:prstDash val="solid"/>
           </a:ln>
-          <a:effectLst>
-            <a:outerShdw sx="100000" sy="100000" kx="0" ky="0" algn="bl" rotWithShape="0" blurRad="101600" dist="50800" dir="5400000">
-              <a:srgbClr val="000000">
-                <a:alpha val="75000"/>
-              </a:srgbClr>
-            </a:outerShdw>
-          </a:effectLst>
         </p:spPr>
       </p:sp>
       <p:sp>
@@ -7780,13 +7549,6 @@
             </a:solidFill>
             <a:prstDash val="solid"/>
           </a:ln>
-          <a:effectLst>
-            <a:outerShdw sx="100000" sy="100000" kx="0" ky="0" algn="bl" rotWithShape="0" blurRad="101600" dist="50800" dir="5400000">
-              <a:srgbClr val="000000">
-                <a:alpha val="75000"/>
-              </a:srgbClr>
-            </a:outerShdw>
-          </a:effectLst>
         </p:spPr>
       </p:sp>
       <p:sp>
@@ -7931,13 +7693,6 @@
             </a:solidFill>
             <a:prstDash val="solid"/>
           </a:ln>
-          <a:effectLst>
-            <a:outerShdw sx="100000" sy="100000" kx="0" ky="0" algn="bl" rotWithShape="0" blurRad="101600" dist="50800" dir="5400000">
-              <a:srgbClr val="000000">
-                <a:alpha val="75000"/>
-              </a:srgbClr>
-            </a:outerShdw>
-          </a:effectLst>
         </p:spPr>
       </p:sp>
       <p:pic>
@@ -8027,13 +7782,6 @@
             </a:solidFill>
             <a:prstDash val="solid"/>
           </a:ln>
-          <a:effectLst>
-            <a:outerShdw sx="100000" sy="100000" kx="0" ky="0" algn="bl" rotWithShape="0" blurRad="101600" dist="50800" dir="5400000">
-              <a:srgbClr val="000000">
-                <a:alpha val="75000"/>
-              </a:srgbClr>
-            </a:outerShdw>
-          </a:effectLst>
         </p:spPr>
       </p:sp>
       <p:pic>
@@ -8220,13 +7968,6 @@
             </a:solidFill>
             <a:prstDash val="solid"/>
           </a:ln>
-          <a:effectLst>
-            <a:outerShdw sx="100000" sy="100000" kx="0" ky="0" algn="bl" rotWithShape="0" blurRad="101600" dist="50800" dir="5400000">
-              <a:srgbClr val="000000">
-                <a:alpha val="75000"/>
-              </a:srgbClr>
-            </a:outerShdw>
-          </a:effectLst>
         </p:spPr>
       </p:sp>
       <p:sp>
@@ -9950,13 +9691,6 @@
             </a:solidFill>
             <a:prstDash val="solid"/>
           </a:ln>
-          <a:effectLst>
-            <a:outerShdw sx="100000" sy="100000" kx="0" ky="0" algn="bl" rotWithShape="0" blurRad="101600" dist="50800" dir="5400000">
-              <a:srgbClr val="000000">
-                <a:alpha val="75000"/>
-              </a:srgbClr>
-            </a:outerShdw>
-          </a:effectLst>
         </p:spPr>
       </p:sp>
       <p:sp>
@@ -10101,13 +9835,6 @@
             </a:solidFill>
             <a:prstDash val="solid"/>
           </a:ln>
-          <a:effectLst>
-            <a:outerShdw sx="100000" sy="100000" kx="0" ky="0" algn="bl" rotWithShape="0" blurRad="101600" dist="50800" dir="5400000">
-              <a:srgbClr val="000000">
-                <a:alpha val="75000"/>
-              </a:srgbClr>
-            </a:outerShdw>
-          </a:effectLst>
         </p:spPr>
       </p:sp>
       <p:sp>
@@ -10276,13 +10003,6 @@
             </a:solidFill>
             <a:prstDash val="solid"/>
           </a:ln>
-          <a:effectLst>
-            <a:outerShdw sx="100000" sy="100000" kx="0" ky="0" algn="bl" rotWithShape="0" blurRad="101600" dist="50800" dir="5400000">
-              <a:srgbClr val="000000">
-                <a:alpha val="75000"/>
-              </a:srgbClr>
-            </a:outerShdw>
-          </a:effectLst>
         </p:spPr>
       </p:sp>
       <p:sp>
@@ -10411,13 +10131,6 @@
             </a:solidFill>
             <a:prstDash val="solid"/>
           </a:ln>
-          <a:effectLst>
-            <a:outerShdw sx="100000" sy="100000" kx="0" ky="0" algn="bl" rotWithShape="0" blurRad="101600" dist="50800" dir="5400000">
-              <a:srgbClr val="000000">
-                <a:alpha val="75000"/>
-              </a:srgbClr>
-            </a:outerShdw>
-          </a:effectLst>
         </p:spPr>
       </p:sp>
       <p:sp>
@@ -10546,13 +10259,6 @@
             </a:solidFill>
             <a:prstDash val="solid"/>
           </a:ln>
-          <a:effectLst>
-            <a:outerShdw sx="100000" sy="100000" kx="0" ky="0" algn="bl" rotWithShape="0" blurRad="101600" dist="50800" dir="5400000">
-              <a:srgbClr val="000000">
-                <a:alpha val="75000"/>
-              </a:srgbClr>
-            </a:outerShdw>
-          </a:effectLst>
         </p:spPr>
       </p:sp>
       <p:sp>
@@ -10721,13 +10427,6 @@
             </a:solidFill>
             <a:prstDash val="solid"/>
           </a:ln>
-          <a:effectLst>
-            <a:outerShdw sx="100000" sy="100000" kx="0" ky="0" algn="bl" rotWithShape="0" blurRad="101600" dist="50800" dir="5400000">
-              <a:srgbClr val="000000">
-                <a:alpha val="75000"/>
-              </a:srgbClr>
-            </a:outerShdw>
-          </a:effectLst>
         </p:spPr>
       </p:sp>
       <p:sp>
@@ -10856,13 +10555,6 @@
             </a:solidFill>
             <a:prstDash val="solid"/>
           </a:ln>
-          <a:effectLst>
-            <a:outerShdw sx="100000" sy="100000" kx="0" ky="0" algn="bl" rotWithShape="0" blurRad="101600" dist="50800" dir="5400000">
-              <a:srgbClr val="000000">
-                <a:alpha val="75000"/>
-              </a:srgbClr>
-            </a:outerShdw>
-          </a:effectLst>
         </p:spPr>
       </p:sp>
       <p:sp>
@@ -10991,13 +10683,6 @@
             </a:solidFill>
             <a:prstDash val="solid"/>
           </a:ln>
-          <a:effectLst>
-            <a:outerShdw sx="100000" sy="100000" kx="0" ky="0" algn="bl" rotWithShape="0" blurRad="101600" dist="50800" dir="5400000">
-              <a:srgbClr val="000000">
-                <a:alpha val="75000"/>
-              </a:srgbClr>
-            </a:outerShdw>
-          </a:effectLst>
         </p:spPr>
       </p:sp>
       <p:sp>
@@ -11166,13 +10851,6 @@
             </a:solidFill>
             <a:prstDash val="solid"/>
           </a:ln>
-          <a:effectLst>
-            <a:outerShdw sx="100000" sy="100000" kx="0" ky="0" algn="bl" rotWithShape="0" blurRad="101600" dist="50800" dir="5400000">
-              <a:srgbClr val="000000">
-                <a:alpha val="75000"/>
-              </a:srgbClr>
-            </a:outerShdw>
-          </a:effectLst>
         </p:spPr>
       </p:sp>
       <p:sp>
@@ -11301,13 +10979,6 @@
             </a:solidFill>
             <a:prstDash val="solid"/>
           </a:ln>
-          <a:effectLst>
-            <a:outerShdw sx="100000" sy="100000" kx="0" ky="0" algn="bl" rotWithShape="0" blurRad="101600" dist="50800" dir="5400000">
-              <a:srgbClr val="000000">
-                <a:alpha val="75000"/>
-              </a:srgbClr>
-            </a:outerShdw>
-          </a:effectLst>
         </p:spPr>
       </p:sp>
       <p:sp>
@@ -11544,13 +11215,6 @@
             </a:solidFill>
             <a:prstDash val="solid"/>
           </a:ln>
-          <a:effectLst>
-            <a:outerShdw sx="100000" sy="100000" kx="0" ky="0" algn="bl" rotWithShape="0" blurRad="101600" dist="50800" dir="5400000">
-              <a:srgbClr val="000000">
-                <a:alpha val="75000"/>
-              </a:srgbClr>
-            </a:outerShdw>
-          </a:effectLst>
         </p:spPr>
       </p:sp>
       <p:sp>
@@ -11695,13 +11359,6 @@
             </a:solidFill>
             <a:prstDash val="solid"/>
           </a:ln>
-          <a:effectLst>
-            <a:outerShdw sx="100000" sy="100000" kx="0" ky="0" algn="bl" rotWithShape="0" blurRad="101600" dist="50800" dir="5400000">
-              <a:srgbClr val="000000">
-                <a:alpha val="75000"/>
-              </a:srgbClr>
-            </a:outerShdw>
-          </a:effectLst>
         </p:spPr>
       </p:sp>
       <p:graphicFrame>
@@ -11745,13 +11402,6 @@
             </a:solidFill>
             <a:prstDash val="solid"/>
           </a:ln>
-          <a:effectLst>
-            <a:outerShdw sx="100000" sy="100000" kx="0" ky="0" algn="bl" rotWithShape="0" blurRad="101600" dist="50800" dir="5400000">
-              <a:srgbClr val="000000">
-                <a:alpha val="75000"/>
-              </a:srgbClr>
-            </a:outerShdw>
-          </a:effectLst>
         </p:spPr>
       </p:sp>
       <p:sp>
@@ -11857,13 +11507,6 @@
             </a:solidFill>
             <a:prstDash val="solid"/>
           </a:ln>
-          <a:effectLst>
-            <a:outerShdw sx="100000" sy="100000" kx="0" ky="0" algn="bl" rotWithShape="0" blurRad="101600" dist="50800" dir="5400000">
-              <a:srgbClr val="000000">
-                <a:alpha val="75000"/>
-              </a:srgbClr>
-            </a:outerShdw>
-          </a:effectLst>
         </p:spPr>
       </p:sp>
       <p:sp>
@@ -11969,13 +11612,6 @@
             </a:solidFill>
             <a:prstDash val="solid"/>
           </a:ln>
-          <a:effectLst>
-            <a:outerShdw sx="100000" sy="100000" kx="0" ky="0" algn="bl" rotWithShape="0" blurRad="101600" dist="50800" dir="5400000">
-              <a:srgbClr val="000000">
-                <a:alpha val="75000"/>
-              </a:srgbClr>
-            </a:outerShdw>
-          </a:effectLst>
         </p:spPr>
       </p:sp>
       <p:sp>
@@ -13342,13 +12978,6 @@
             </a:solidFill>
             <a:prstDash val="solid"/>
           </a:ln>
-          <a:effectLst>
-            <a:outerShdw sx="100000" sy="100000" kx="0" ky="0" algn="bl" rotWithShape="0" blurRad="101600" dist="50800" dir="5400000">
-              <a:srgbClr val="000000">
-                <a:alpha val="75000"/>
-              </a:srgbClr>
-            </a:outerShdw>
-          </a:effectLst>
         </p:spPr>
       </p:sp>
       <p:sp>
@@ -13815,13 +13444,6 @@
             </a:solidFill>
             <a:prstDash val="solid"/>
           </a:ln>
-          <a:effectLst>
-            <a:outerShdw sx="100000" sy="100000" kx="0" ky="0" algn="bl" rotWithShape="0" blurRad="101600" dist="50800" dir="5400000">
-              <a:srgbClr val="000000">
-                <a:alpha val="75000"/>
-              </a:srgbClr>
-            </a:outerShdw>
-          </a:effectLst>
         </p:spPr>
       </p:sp>
       <p:sp>
@@ -13966,13 +13588,6 @@
             </a:solidFill>
             <a:prstDash val="solid"/>
           </a:ln>
-          <a:effectLst>
-            <a:outerShdw sx="100000" sy="100000" kx="0" ky="0" algn="bl" rotWithShape="0" blurRad="101600" dist="50800" dir="5400000">
-              <a:srgbClr val="000000">
-                <a:alpha val="75000"/>
-              </a:srgbClr>
-            </a:outerShdw>
-          </a:effectLst>
         </p:spPr>
       </p:sp>
       <p:sp>
@@ -14117,13 +13732,6 @@
             </a:solidFill>
             <a:prstDash val="solid"/>
           </a:ln>
-          <a:effectLst>
-            <a:outerShdw sx="100000" sy="100000" kx="0" ky="0" algn="bl" rotWithShape="0" blurRad="101600" dist="50800" dir="5400000">
-              <a:srgbClr val="000000">
-                <a:alpha val="75000"/>
-              </a:srgbClr>
-            </a:outerShdw>
-          </a:effectLst>
         </p:spPr>
       </p:sp>
       <p:sp>
@@ -14268,13 +13876,6 @@
             </a:solidFill>
             <a:prstDash val="solid"/>
           </a:ln>
-          <a:effectLst>
-            <a:outerShdw sx="100000" sy="100000" kx="0" ky="0" algn="bl" rotWithShape="0" blurRad="101600" dist="50800" dir="5400000">
-              <a:srgbClr val="000000">
-                <a:alpha val="75000"/>
-              </a:srgbClr>
-            </a:outerShdw>
-          </a:effectLst>
         </p:spPr>
       </p:sp>
       <p:sp>
@@ -14419,13 +14020,6 @@
             </a:solidFill>
             <a:prstDash val="solid"/>
           </a:ln>
-          <a:effectLst>
-            <a:outerShdw sx="100000" sy="100000" kx="0" ky="0" algn="bl" rotWithShape="0" blurRad="101600" dist="50800" dir="5400000">
-              <a:srgbClr val="000000">
-                <a:alpha val="75000"/>
-              </a:srgbClr>
-            </a:outerShdw>
-          </a:effectLst>
         </p:spPr>
       </p:sp>
       <p:sp>
@@ -14531,13 +14125,6 @@
             </a:solidFill>
             <a:prstDash val="solid"/>
           </a:ln>
-          <a:effectLst>
-            <a:outerShdw sx="100000" sy="100000" kx="0" ky="0" algn="bl" rotWithShape="0" blurRad="101600" dist="50800" dir="5400000">
-              <a:srgbClr val="000000">
-                <a:alpha val="75000"/>
-              </a:srgbClr>
-            </a:outerShdw>
-          </a:effectLst>
         </p:spPr>
       </p:sp>
       <p:sp>
@@ -14574,7 +14161,7 @@
         <p:spPr>
           <a:xfrm>
             <a:off x="640080" y="2880360"/>
-            <a:ext cx="2377440" cy="320040"/>
+            <a:ext cx="2377440" cy="347472"/>
           </a:xfrm>
           <a:prstGeom prst="rect">
             <a:avLst/>
@@ -14590,7 +14177,7 @@
               <a:buNone/>
             </a:pPr>
             <a:r>
-              <a:rPr lang="ko-KR" altLang="en-US" sz="1250" b="1" dirty="0">
+              <a:rPr lang="ko-KR" altLang="en-US" sz="1450" b="1" dirty="0">
                 <a:solidFill>
                   <a:srgbClr val="000000"/>
                 </a:solidFill>
@@ -14600,7 +14187,7 @@
               </a:rPr>
               <a:t>💪 S 강점</a:t>
             </a:r>
-            <a:endParaRPr lang="ko-KR" altLang="en-US" sz="1250" dirty="0"/>
+            <a:endParaRPr lang="ko-KR" altLang="en-US" sz="1450" dirty="0"/>
           </a:p>
         </p:txBody>
       </p:sp>
@@ -14612,7 +14199,7 @@
         </p:nvSpPr>
         <p:spPr>
           <a:xfrm>
-            <a:off x="640080" y="3246120"/>
+            <a:off x="640080" y="3273552"/>
             <a:ext cx="2377440" cy="731520"/>
           </a:xfrm>
           <a:prstGeom prst="rect">
@@ -14629,7 +14216,7 @@
               <a:buNone/>
             </a:pPr>
             <a:r>
-              <a:rPr lang="ko-KR" altLang="en-US" sz="1200" dirty="0">
+              <a:rPr lang="ko-KR" altLang="en-US" sz="1400" dirty="0">
                 <a:solidFill>
                   <a:srgbClr val="000000"/>
                 </a:solidFill>
@@ -14639,14 +14226,14 @@
               </a:rPr>
               <a:t>데이터 근거, 시 정책 연동</a:t>
             </a:r>
-            <a:endParaRPr lang="ko-KR" altLang="en-US" sz="1200" dirty="0"/>
-          </a:p>
-          <a:p>
-            <a:pPr eaLnBrk="0" latinLnBrk="0" indent="0" marL="0">
-              <a:buNone/>
-            </a:pPr>
-            <a:r>
-              <a:rPr lang="ko-KR" altLang="en-US" sz="1200" dirty="0">
+            <a:endParaRPr lang="ko-KR" altLang="en-US" sz="1400" dirty="0"/>
+          </a:p>
+          <a:p>
+            <a:pPr eaLnBrk="0" latinLnBrk="0" indent="0" marL="0">
+              <a:buNone/>
+            </a:pPr>
+            <a:r>
+              <a:rPr lang="ko-KR" altLang="en-US" sz="1400" dirty="0">
                 <a:solidFill>
                   <a:srgbClr val="000000"/>
                 </a:solidFill>
@@ -14656,7 +14243,7 @@
               </a:rPr>
               <a:t>손님·기사 모두 이득</a:t>
             </a:r>
-            <a:endParaRPr lang="ko-KR" altLang="en-US" sz="1200" dirty="0"/>
+            <a:endParaRPr lang="ko-KR" altLang="en-US" sz="1400" dirty="0"/>
           </a:p>
         </p:txBody>
       </p:sp>
@@ -14685,13 +14272,6 @@
             </a:solidFill>
             <a:prstDash val="solid"/>
           </a:ln>
-          <a:effectLst>
-            <a:outerShdw sx="100000" sy="100000" kx="0" ky="0" algn="bl" rotWithShape="0" blurRad="101600" dist="50800" dir="5400000">
-              <a:srgbClr val="000000">
-                <a:alpha val="75000"/>
-              </a:srgbClr>
-            </a:outerShdw>
-          </a:effectLst>
         </p:spPr>
       </p:sp>
       <p:sp>
@@ -14728,7 +14308,7 @@
         <p:spPr>
           <a:xfrm>
             <a:off x="3429000" y="2880360"/>
-            <a:ext cx="2377440" cy="320040"/>
+            <a:ext cx="2377440" cy="347472"/>
           </a:xfrm>
           <a:prstGeom prst="rect">
             <a:avLst/>
@@ -14744,7 +14324,7 @@
               <a:buNone/>
             </a:pPr>
             <a:r>
-              <a:rPr lang="ko-KR" altLang="en-US" sz="1250" b="1" dirty="0">
+              <a:rPr lang="ko-KR" altLang="en-US" sz="1450" b="1" dirty="0">
                 <a:solidFill>
                   <a:srgbClr val="000000"/>
                 </a:solidFill>
@@ -14754,7 +14334,7 @@
               </a:rPr>
               <a:t>⚠️ W 약점</a:t>
             </a:r>
-            <a:endParaRPr lang="ko-KR" altLang="en-US" sz="1250" dirty="0"/>
+            <a:endParaRPr lang="ko-KR" altLang="en-US" sz="1450" dirty="0"/>
           </a:p>
         </p:txBody>
       </p:sp>
@@ -14766,7 +14346,7 @@
         </p:nvSpPr>
         <p:spPr>
           <a:xfrm>
-            <a:off x="3429000" y="3246120"/>
+            <a:off x="3429000" y="3273552"/>
             <a:ext cx="2377440" cy="731520"/>
           </a:xfrm>
           <a:prstGeom prst="rect">
@@ -14783,7 +14363,7 @@
               <a:buNone/>
             </a:pPr>
             <a:r>
-              <a:rPr lang="ko-KR" altLang="en-US" sz="1200" dirty="0">
+              <a:rPr lang="ko-KR" altLang="en-US" sz="1400" dirty="0">
                 <a:solidFill>
                   <a:srgbClr val="000000"/>
                 </a:solidFill>
@@ -14793,14 +14373,14 @@
               </a:rPr>
               <a:t>초기 이용자 확보</a:t>
             </a:r>
-            <a:endParaRPr lang="ko-KR" altLang="en-US" sz="1200" dirty="0"/>
-          </a:p>
-          <a:p>
-            <a:pPr eaLnBrk="0" latinLnBrk="0" indent="0" marL="0">
-              <a:buNone/>
-            </a:pPr>
-            <a:r>
-              <a:rPr lang="ko-KR" altLang="en-US" sz="1200" dirty="0">
+            <a:endParaRPr lang="ko-KR" altLang="en-US" sz="1400" dirty="0"/>
+          </a:p>
+          <a:p>
+            <a:pPr eaLnBrk="0" latinLnBrk="0" indent="0" marL="0">
+              <a:buNone/>
+            </a:pPr>
+            <a:r>
+              <a:rPr lang="ko-KR" altLang="en-US" sz="1400" dirty="0">
                 <a:solidFill>
                   <a:srgbClr val="000000"/>
                 </a:solidFill>
@@ -14810,7 +14390,7 @@
               </a:rPr>
               <a:t>제휴 필요</a:t>
             </a:r>
-            <a:endParaRPr lang="ko-KR" altLang="en-US" sz="1200" dirty="0"/>
+            <a:endParaRPr lang="ko-KR" altLang="en-US" sz="1400" dirty="0"/>
           </a:p>
         </p:txBody>
       </p:sp>
@@ -14839,13 +14419,6 @@
             </a:solidFill>
             <a:prstDash val="solid"/>
           </a:ln>
-          <a:effectLst>
-            <a:outerShdw sx="100000" sy="100000" kx="0" ky="0" algn="bl" rotWithShape="0" blurRad="101600" dist="50800" dir="5400000">
-              <a:srgbClr val="000000">
-                <a:alpha val="75000"/>
-              </a:srgbClr>
-            </a:outerShdw>
-          </a:effectLst>
         </p:spPr>
       </p:sp>
       <p:sp>
@@ -14882,7 +14455,7 @@
         <p:spPr>
           <a:xfrm>
             <a:off x="640080" y="4297680"/>
-            <a:ext cx="2377440" cy="320040"/>
+            <a:ext cx="2377440" cy="347472"/>
           </a:xfrm>
           <a:prstGeom prst="rect">
             <a:avLst/>
@@ -14898,7 +14471,7 @@
               <a:buNone/>
             </a:pPr>
             <a:r>
-              <a:rPr lang="ko-KR" altLang="en-US" sz="1250" b="1" dirty="0">
+              <a:rPr lang="ko-KR" altLang="en-US" sz="1450" b="1" dirty="0">
                 <a:solidFill>
                   <a:srgbClr val="000000"/>
                 </a:solidFill>
@@ -14908,7 +14481,7 @@
               </a:rPr>
               <a:t>🌱 O 기회</a:t>
             </a:r>
-            <a:endParaRPr lang="ko-KR" altLang="en-US" sz="1250" dirty="0"/>
+            <a:endParaRPr lang="ko-KR" altLang="en-US" sz="1450" dirty="0"/>
           </a:p>
         </p:txBody>
       </p:sp>
@@ -14920,7 +14493,7 @@
         </p:nvSpPr>
         <p:spPr>
           <a:xfrm>
-            <a:off x="640080" y="4663440"/>
+            <a:off x="640080" y="4690872"/>
             <a:ext cx="2377440" cy="731520"/>
           </a:xfrm>
           <a:prstGeom prst="rect">
@@ -14937,7 +14510,7 @@
               <a:buNone/>
             </a:pPr>
             <a:r>
-              <a:rPr lang="ko-KR" altLang="en-US" sz="1200" dirty="0">
+              <a:rPr lang="ko-KR" altLang="en-US" sz="1400" dirty="0">
                 <a:solidFill>
                   <a:srgbClr val="000000"/>
                 </a:solidFill>
@@ -14947,14 +14520,14 @@
               </a:rPr>
               <a:t>9/28 개편 여론, KTX 수요</a:t>
             </a:r>
-            <a:endParaRPr lang="ko-KR" altLang="en-US" sz="1200" dirty="0"/>
-          </a:p>
-          <a:p>
-            <a:pPr eaLnBrk="0" latinLnBrk="0" indent="0" marL="0">
-              <a:buNone/>
-            </a:pPr>
-            <a:r>
-              <a:rPr lang="ko-KR" altLang="en-US" sz="1200" dirty="0">
+            <a:endParaRPr lang="ko-KR" altLang="en-US" sz="1400" dirty="0"/>
+          </a:p>
+          <a:p>
+            <a:pPr eaLnBrk="0" latinLnBrk="0" indent="0" marL="0">
+              <a:buNone/>
+            </a:pPr>
+            <a:r>
+              <a:rPr lang="ko-KR" altLang="en-US" sz="1400" dirty="0">
                 <a:solidFill>
                   <a:srgbClr val="000000"/>
                 </a:solidFill>
@@ -14964,7 +14537,7 @@
               </a:rPr>
               <a:t>반반택시 선례</a:t>
             </a:r>
-            <a:endParaRPr lang="ko-KR" altLang="en-US" sz="1200" dirty="0"/>
+            <a:endParaRPr lang="ko-KR" altLang="en-US" sz="1400" dirty="0"/>
           </a:p>
         </p:txBody>
       </p:sp>
@@ -14993,13 +14566,6 @@
             </a:solidFill>
             <a:prstDash val="solid"/>
           </a:ln>
-          <a:effectLst>
-            <a:outerShdw sx="100000" sy="100000" kx="0" ky="0" algn="bl" rotWithShape="0" blurRad="101600" dist="50800" dir="5400000">
-              <a:srgbClr val="000000">
-                <a:alpha val="75000"/>
-              </a:srgbClr>
-            </a:outerShdw>
-          </a:effectLst>
         </p:spPr>
       </p:sp>
       <p:sp>
@@ -15036,7 +14602,7 @@
         <p:spPr>
           <a:xfrm>
             <a:off x="3429000" y="4297680"/>
-            <a:ext cx="2377440" cy="320040"/>
+            <a:ext cx="2377440" cy="347472"/>
           </a:xfrm>
           <a:prstGeom prst="rect">
             <a:avLst/>
@@ -15052,7 +14618,7 @@
               <a:buNone/>
             </a:pPr>
             <a:r>
-              <a:rPr lang="ko-KR" altLang="en-US" sz="1250" b="1" dirty="0">
+              <a:rPr lang="ko-KR" altLang="en-US" sz="1450" b="1" dirty="0">
                 <a:solidFill>
                   <a:srgbClr val="000000"/>
                 </a:solidFill>
@@ -15062,7 +14628,7 @@
               </a:rPr>
               <a:t>🌩️ T 위협</a:t>
             </a:r>
-            <a:endParaRPr lang="ko-KR" altLang="en-US" sz="1250" dirty="0"/>
+            <a:endParaRPr lang="ko-KR" altLang="en-US" sz="1450" dirty="0"/>
           </a:p>
         </p:txBody>
       </p:sp>
@@ -15074,7 +14640,7 @@
         </p:nvSpPr>
         <p:spPr>
           <a:xfrm>
-            <a:off x="3429000" y="4663440"/>
+            <a:off x="3429000" y="4690872"/>
             <a:ext cx="2377440" cy="731520"/>
           </a:xfrm>
           <a:prstGeom prst="rect">
@@ -15091,7 +14657,7 @@
               <a:buNone/>
             </a:pPr>
             <a:r>
-              <a:rPr lang="ko-KR" altLang="en-US" sz="1200" dirty="0">
+              <a:rPr lang="ko-KR" altLang="en-US" sz="1400" dirty="0">
                 <a:solidFill>
                   <a:srgbClr val="000000"/>
                 </a:solidFill>
@@ -15101,14 +14667,14 @@
               </a:rPr>
               <a:t>대형 호출 앱 진입</a:t>
             </a:r>
-            <a:endParaRPr lang="ko-KR" altLang="en-US" sz="1200" dirty="0"/>
-          </a:p>
-          <a:p>
-            <a:pPr eaLnBrk="0" latinLnBrk="0" indent="0" marL="0">
-              <a:buNone/>
-            </a:pPr>
-            <a:r>
-              <a:rPr lang="ko-KR" altLang="en-US" sz="1200" dirty="0">
+            <a:endParaRPr lang="ko-KR" altLang="en-US" sz="1400" dirty="0"/>
+          </a:p>
+          <a:p>
+            <a:pPr eaLnBrk="0" latinLnBrk="0" indent="0" marL="0">
+              <a:buNone/>
+            </a:pPr>
+            <a:r>
+              <a:rPr lang="ko-KR" altLang="en-US" sz="1400" dirty="0">
                 <a:solidFill>
                   <a:srgbClr val="000000"/>
                 </a:solidFill>
@@ -15118,7 +14684,7 @@
               </a:rPr>
               <a:t>업계 반발</a:t>
             </a:r>
-            <a:endParaRPr lang="ko-KR" altLang="en-US" sz="1200" dirty="0"/>
+            <a:endParaRPr lang="ko-KR" altLang="en-US" sz="1400" dirty="0"/>
           </a:p>
         </p:txBody>
       </p:sp>
@@ -15147,13 +14713,6 @@
             </a:solidFill>
             <a:prstDash val="solid"/>
           </a:ln>
-          <a:effectLst>
-            <a:outerShdw sx="100000" sy="100000" kx="0" ky="0" algn="bl" rotWithShape="0" blurRad="101600" dist="50800" dir="5400000">
-              <a:srgbClr val="000000">
-                <a:alpha val="75000"/>
-              </a:srgbClr>
-            </a:outerShdw>
-          </a:effectLst>
         </p:spPr>
       </p:sp>
       <p:sp>
@@ -15203,7 +14762,7 @@
         </p:nvSpPr>
         <p:spPr>
           <a:xfrm>
-            <a:off x="6355080" y="3246120"/>
+            <a:off x="6355080" y="3291840"/>
             <a:ext cx="5166360" cy="2103120"/>
           </a:xfrm>
           <a:prstGeom prst="rect">
@@ -15218,16 +14777,16 @@
           <a:p>
             <a:pPr eaLnBrk="0" latinLnBrk="0" marL="342900" indent="-342900">
               <a:lnSpc>
-                <a:spcPct val="115000"/>
+                <a:spcPct val="120000"/>
               </a:lnSpc>
               <a:spcAft>
-                <a:spcPts val="600"/>
+                <a:spcPts val="1200"/>
               </a:spcAft>
               <a:buSzPct val="100000"/>
               <a:buChar char="•"/>
             </a:pPr>
             <a:r>
-              <a:rPr lang="ko-KR" altLang="en-US" sz="1150" dirty="0">
+              <a:rPr lang="ko-KR" altLang="en-US" sz="1400" dirty="0">
                 <a:solidFill>
                   <a:srgbClr val="FFFFFF"/>
                 </a:solidFill>
@@ -15237,21 +14796,21 @@
               </a:rPr>
               <a:t>법: 왕복 매칭은 동승이 아니라 합승 규제 밖, 합승은 택시발전법 시행규칙 제11조의2 준수</a:t>
             </a:r>
-            <a:endParaRPr lang="ko-KR" altLang="en-US" sz="1150" dirty="0"/>
+            <a:endParaRPr lang="ko-KR" altLang="en-US" sz="1400" dirty="0"/>
           </a:p>
           <a:p>
             <a:pPr eaLnBrk="0" latinLnBrk="0" marL="342900" indent="-342900">
               <a:lnSpc>
-                <a:spcPct val="115000"/>
+                <a:spcPct val="120000"/>
               </a:lnSpc>
               <a:spcAft>
-                <a:spcPts val="600"/>
+                <a:spcPts val="1200"/>
               </a:spcAft>
               <a:buSzPct val="100000"/>
               <a:buChar char="•"/>
             </a:pPr>
             <a:r>
-              <a:rPr lang="ko-KR" altLang="en-US" sz="1150" dirty="0">
+              <a:rPr lang="ko-KR" altLang="en-US" sz="1400" dirty="0">
                 <a:solidFill>
                   <a:srgbClr val="FFFFFF"/>
                 </a:solidFill>
@@ -15261,21 +14820,21 @@
               </a:rPr>
               <a:t>효과: 손님 할증↓ · 기사 공차↓ 수입↑ · 시 보전 예산↓ · 빈 차 주행·탄소↓</a:t>
             </a:r>
-            <a:endParaRPr lang="ko-KR" altLang="en-US" sz="1150" dirty="0"/>
+            <a:endParaRPr lang="ko-KR" altLang="en-US" sz="1400" dirty="0"/>
           </a:p>
           <a:p>
             <a:pPr eaLnBrk="0" latinLnBrk="0" marL="342900" indent="-342900">
               <a:lnSpc>
-                <a:spcPct val="115000"/>
+                <a:spcPct val="120000"/>
               </a:lnSpc>
               <a:spcAft>
-                <a:spcPts val="600"/>
+                <a:spcPts val="1200"/>
               </a:spcAft>
               <a:buSzPct val="100000"/>
               <a:buChar char="•"/>
             </a:pPr>
             <a:r>
-              <a:rPr lang="ko-KR" altLang="en-US" sz="1150" dirty="0">
+              <a:rPr lang="ko-KR" altLang="en-US" sz="1400" dirty="0">
                 <a:solidFill>
                   <a:srgbClr val="FFFFFF"/>
                 </a:solidFill>
@@ -15285,7 +14844,7 @@
               </a:rPr>
               <a:t>한계: 시뮬레이션 기반, 요율 보도 기준, 면제는 시 고시 변경 필요</a:t>
             </a:r>
-            <a:endParaRPr lang="ko-KR" altLang="en-US" sz="1150" dirty="0"/>
+            <a:endParaRPr lang="ko-KR" altLang="en-US" sz="1400" dirty="0"/>
           </a:p>
         </p:txBody>
       </p:sp>

--- a/presentation/쉐어택_발표_v3.pptx
+++ b/presentation/쉐어택_발표_v3.pptx
@@ -888,6 +888,285 @@
 </c:chartSpace>
 </file>
 
+<file path=ppt/charts/chart3.xml><?xml version="1.0" encoding="utf-8"?>
+<c:chartSpace xmlns:c="http://schemas.openxmlformats.org/drawingml/2006/chart" xmlns:a="http://schemas.openxmlformats.org/drawingml/2006/main" xmlns:r="http://schemas.openxmlformats.org/officeDocument/2006/relationships">
+  <c:date1904 val="0"/>
+  <c:roundedCorners val="1"/>
+  <c:chart>
+    <c:autoTitleDeleted val="1"/>
+    <c:plotArea>
+      <c:layout/>
+      <c:barChart>
+        <c:barDir val="bar"/>
+        <c:grouping val="clustered"/>
+        <c:varyColors val="0"/>
+        <c:ser>
+          <c:idx val="0"/>
+          <c:order val="0"/>
+          <c:tx>
+            <c:strRef>
+              <c:f>Sheet1!$B$1</c:f>
+              <c:strCache>
+                <c:ptCount val="1"/>
+                <c:pt idx="0">
+                  <c:v>응답 비율</c:v>
+                </c:pt>
+              </c:strCache>
+            </c:strRef>
+          </c:tx>
+          <c:spPr>
+            <a:solidFill>
+              <a:srgbClr val="F2A93B"/>
+            </a:solidFill>
+            <a:effectLst/>
+          </c:spPr>
+          <c:invertIfNegative val="0"/>
+          <c:dLbls>
+            <c:numFmt formatCode="0&quot;%&quot;" sourceLinked="0"/>
+            <c:txPr>
+              <a:bodyPr/>
+              <a:lstStyle/>
+              <a:p>
+                <a:pPr>
+                  <a:defRPr b="1" i="0" strike="noStrike" sz="1200" u="none">
+                    <a:solidFill>
+                      <a:srgbClr val="000000"/>
+                    </a:solidFill>
+                    <a:latin typeface="Arial"/>
+                  </a:defRPr>
+                </a:pPr>
+              </a:p>
+            </c:txPr>
+            <c:showLegendKey val="0"/>
+            <c:showVal val="1"/>
+            <c:showCatName val="0"/>
+            <c:showSerName val="0"/>
+            <c:showPercent val="0"/>
+            <c:showBubbleSize val="0"/>
+            <c:showLeaderLines val="0"/>
+          </c:dLbls>
+          <c:dPt>
+            <c:idx val="0"/>
+            <c:invertIfNegative val="0"/>
+            <c:bubble3D val="0"/>
+            <c:spPr>
+              <a:solidFill>
+                <a:srgbClr val="F2A93B"/>
+              </a:solidFill>
+              <a:effectLst/>
+            </c:spPr>
+          </c:dPt>
+          <c:dPt>
+            <c:idx val="1"/>
+            <c:invertIfNegative val="0"/>
+            <c:bubble3D val="0"/>
+            <c:spPr>
+              <a:solidFill>
+                <a:srgbClr val="F2A93B"/>
+              </a:solidFill>
+              <a:effectLst/>
+            </c:spPr>
+          </c:dPt>
+          <c:dPt>
+            <c:idx val="2"/>
+            <c:invertIfNegative val="0"/>
+            <c:bubble3D val="0"/>
+            <c:spPr>
+              <a:solidFill>
+                <a:srgbClr val="1D9E75"/>
+              </a:solidFill>
+              <a:effectLst/>
+            </c:spPr>
+          </c:dPt>
+          <c:dPt>
+            <c:idx val="3"/>
+            <c:invertIfNegative val="0"/>
+            <c:bubble3D val="0"/>
+            <c:spPr>
+              <a:solidFill>
+                <a:srgbClr val="1D9E75"/>
+              </a:solidFill>
+              <a:effectLst/>
+            </c:spPr>
+          </c:dPt>
+          <c:cat>
+            <c:multiLvlStrRef>
+              <c:f>Sheet1!$A$2:$A$5</c:f>
+              <c:multiLvlStrCache>
+                <c:ptCount val="4"/>
+                <c:lvl>
+                  <c:pt idx="0">
+                    <c:v>할증 때문에 택시 포기·대체</c:v>
+                  </c:pt>
+                  <c:pt idx="1">
+                    <c:v>읍·면 35% 할증 불합리</c:v>
+                  </c:pt>
+                  <c:pt idx="2">
+                    <c:v>할증 없으면 이용 증가</c:v>
+                  </c:pt>
+                  <c:pt idx="3">
+                    <c:v>조건부 나눠 타기 의향</c:v>
+                  </c:pt>
+                </c:lvl>
+              </c:multiLvlStrCache>
+            </c:multiLvlStrRef>
+          </c:cat>
+          <c:val>
+            <c:numRef>
+              <c:f>Sheet1!$B$2:$B$5</c:f>
+              <c:numCache>
+                <c:formatCode>General</c:formatCode>
+                <c:ptCount val="4"/>
+                <c:pt idx="0">
+                  <c:v>63</c:v>
+                </c:pt>
+                <c:pt idx="1">
+                  <c:v>74</c:v>
+                </c:pt>
+                <c:pt idx="2">
+                  <c:v>93</c:v>
+                </c:pt>
+                <c:pt idx="3">
+                  <c:v>96</c:v>
+                </c:pt>
+              </c:numCache>
+            </c:numRef>
+          </c:val>
+        </c:ser>
+        <c:dLbls>
+          <c:numFmt formatCode="0&quot;%&quot;" sourceLinked="0"/>
+          <c:txPr>
+            <a:bodyPr/>
+            <a:lstStyle/>
+            <a:p>
+              <a:pPr>
+                <a:defRPr b="1" i="0" strike="noStrike" sz="1200" u="none">
+                  <a:solidFill>
+                    <a:srgbClr val="000000"/>
+                  </a:solidFill>
+                  <a:latin typeface="Arial"/>
+                </a:defRPr>
+              </a:pPr>
+            </a:p>
+          </c:txPr>
+          <c:showLegendKey val="0"/>
+          <c:showVal val="1"/>
+          <c:showCatName val="0"/>
+          <c:showSerName val="0"/>
+          <c:showPercent val="0"/>
+          <c:showBubbleSize val="0"/>
+          <c:showLeaderLines val="0"/>
+        </c:dLbls>
+        <c:gapWidth val="35"/>
+        <c:overlap val="0"/>
+        <c:axId val="2094734554"/>
+        <c:axId val="2094734552"/>
+        <c:axId val="2094734556"/>
+      </c:barChart>
+      <c:catAx>
+        <c:axId val="2094734554"/>
+        <c:scaling>
+          <c:orientation val="maxMin"/>
+        </c:scaling>
+        <c:delete val="0"/>
+        <c:axPos val="l"/>
+        <c:numFmt formatCode="General" sourceLinked="1"/>
+        <c:majorTickMark val="out"/>
+        <c:minorTickMark val="none"/>
+        <c:tickLblPos val="nextTo"/>
+        <c:spPr>
+          <a:ln w="12700" cap="flat">
+            <a:noFill/>
+            <a:prstDash val="solid"/>
+            <a:round/>
+          </a:ln>
+        </c:spPr>
+        <c:txPr>
+          <a:bodyPr/>
+          <a:lstStyle/>
+          <a:p>
+            <a:pPr>
+              <a:defRPr sz="1100" b="0" i="0" u="none" strike="noStrike">
+                <a:solidFill>
+                  <a:srgbClr val="000000"/>
+                </a:solidFill>
+                <a:latin typeface="Arial"/>
+              </a:defRPr>
+            </a:pPr>
+            <a:endParaRPr lang="en-US"/>
+          </a:p>
+        </c:txPr>
+        <c:crossAx val="2094734552"/>
+        <c:crosses val="autoZero"/>
+        <c:auto val="1"/>
+        <c:lblAlgn val="ctr"/>
+        <c:noMultiLvlLbl val="1"/>
+      </c:catAx>
+      <c:valAx>
+        <c:axId val="2094734552"/>
+        <c:scaling>
+          <c:orientation val="minMax"/>
+          <c:max val="115"/>
+          <c:min val="0"/>
+        </c:scaling>
+        <c:delete val="1"/>
+        <c:axPos val="b"/>
+        <c:numFmt formatCode="General" sourceLinked="0"/>
+        <c:majorTickMark val="out"/>
+        <c:minorTickMark val="none"/>
+        <c:tickLblPos val="low"/>
+        <c:spPr>
+          <a:ln w="12700" cap="flat">
+            <a:solidFill>
+              <a:srgbClr val="888888"/>
+            </a:solidFill>
+            <a:prstDash val="solid"/>
+            <a:round/>
+          </a:ln>
+        </c:spPr>
+        <c:txPr>
+          <a:bodyPr/>
+          <a:lstStyle/>
+          <a:p>
+            <a:pPr>
+              <a:defRPr sz="1200" b="0" i="0" u="none" strike="noStrike">
+                <a:solidFill>
+                  <a:srgbClr val="000000"/>
+                </a:solidFill>
+                <a:latin typeface="Arial"/>
+              </a:defRPr>
+            </a:pPr>
+            <a:endParaRPr lang="en-US"/>
+          </a:p>
+        </c:txPr>
+        <c:crossAx val="2094734554"/>
+        <c:crosses val="autoZero"/>
+        <c:crossBetween val="between"/>
+      </c:valAx>
+      <c:spPr>
+        <a:noFill/>
+        <a:ln>
+          <a:noFill/>
+        </a:ln>
+        <a:effectLst/>
+      </c:spPr>
+    </c:plotArea>
+    <c:plotVisOnly val="1"/>
+    <c:dispBlanksAs val="span"/>
+  </c:chart>
+  <c:spPr>
+    <a:noFill/>
+    <a:ln>
+      <a:noFill/>
+    </a:ln>
+    <a:effectLst/>
+  </c:spPr>
+  <c:externalData r:id="rId1">
+    <c:autoUpdate val="0"/>
+  </c:externalData>
+</c:chartSpace>
+</file>
+
 <file path=ppt/notesMasters/notesMaster1.xml><?xml version="1.0" encoding="utf-8"?>
 <p:notesMaster xmlns:a="http://schemas.openxmlformats.org/drawingml/2006/main" xmlns:r="http://schemas.openxmlformats.org/officeDocument/2006/relationships" xmlns:p="http://schemas.openxmlformats.org/presentationml/2006/main">
   <p:cSld>
@@ -7662,7 +7941,7 @@
                 <a:ea typeface="Malgun Gothic" pitchFamily="34" charset="-122"/>
                 <a:cs typeface="Malgun Gothic" pitchFamily="34" charset="-120"/>
               </a:rPr>
-              <a:t>왕복 매칭 · 귀로 연계 결제 · 나눠 타기</a:t>
+              <a:t>① 주소·GPS로 출발·도착 → ② 할증 없이 가기 확인 → ③ 모집 열기·참여</a:t>
             </a:r>
             <a:endParaRPr lang="ko-KR" altLang="en-US" sz="1500" dirty="0"/>
           </a:p>
@@ -13019,321 +13298,25 @@
           </a:p>
         </p:txBody>
       </p:sp>
-      <p:sp>
-        <p:nvSpPr>
-          <p:cNvPr id="21" name="Text 16"/>
-          <p:cNvSpPr txBox="1"/>
-          <p:nvPr/>
-        </p:nvSpPr>
-        <p:spPr>
-          <a:xfrm>
-            <a:off x="5623560" y="4983480"/>
-            <a:ext cx="1417320" cy="502920"/>
-          </a:xfrm>
-          <a:prstGeom prst="rect">
-            <a:avLst/>
-          </a:prstGeom>
-          <a:noFill/>
-          <a:ln/>
-        </p:spPr>
-        <p:txBody>
-          <a:bodyPr wrap="square" lIns="0" tIns="0" rIns="0" bIns="0" rtlCol="0" anchor="t"/>
-          <a:lstStyle/>
-          <a:p>
-            <a:pPr eaLnBrk="0" latinLnBrk="0" indent="0" marL="0">
-              <a:buNone/>
-            </a:pPr>
-            <a:r>
-              <a:rPr lang="ko-KR" altLang="en-US" sz="2200" b="1" dirty="0">
-                <a:solidFill>
-                  <a:srgbClr val="000000"/>
-                </a:solidFill>
-                <a:latin typeface="Malgun Gothic" pitchFamily="34" charset="0"/>
-                <a:ea typeface="Malgun Gothic" pitchFamily="34" charset="-122"/>
-                <a:cs typeface="Malgun Gothic" pitchFamily="34" charset="-120"/>
-              </a:rPr>
-              <a:t>63%</a:t>
-            </a:r>
-            <a:endParaRPr lang="ko-KR" altLang="en-US" sz="2200" dirty="0"/>
-          </a:p>
-        </p:txBody>
-      </p:sp>
-      <p:sp>
-        <p:nvSpPr>
-          <p:cNvPr id="22" name="Text 17"/>
-          <p:cNvSpPr txBox="1"/>
-          <p:nvPr/>
-        </p:nvSpPr>
-        <p:spPr>
-          <a:xfrm>
-            <a:off x="5623560" y="5468112"/>
-            <a:ext cx="1417320" cy="685800"/>
-          </a:xfrm>
-          <a:prstGeom prst="rect">
-            <a:avLst/>
-          </a:prstGeom>
-          <a:noFill/>
-          <a:ln/>
-        </p:spPr>
-        <p:txBody>
-          <a:bodyPr wrap="square" lIns="0" tIns="0" rIns="0" bIns="0" rtlCol="0" anchor="t"/>
-          <a:lstStyle/>
-          <a:p>
-            <a:pPr eaLnBrk="0" latinLnBrk="0" indent="0" marL="0">
-              <a:buNone/>
-            </a:pPr>
-            <a:r>
-              <a:rPr lang="ko-KR" altLang="en-US" sz="1100" dirty="0">
-                <a:solidFill>
-                  <a:srgbClr val="000000"/>
-                </a:solidFill>
-                <a:latin typeface="Malgun Gothic" pitchFamily="34" charset="0"/>
-                <a:ea typeface="Malgun Gothic" pitchFamily="34" charset="-122"/>
-                <a:cs typeface="Malgun Gothic" pitchFamily="34" charset="-120"/>
-              </a:rPr>
-              <a:t>할증 때문에 택시 포기·대체</a:t>
-            </a:r>
-            <a:endParaRPr lang="ko-KR" altLang="en-US" sz="1100" dirty="0"/>
-          </a:p>
-        </p:txBody>
-      </p:sp>
-      <p:sp>
-        <p:nvSpPr>
-          <p:cNvPr id="23" name="Text 18"/>
-          <p:cNvSpPr txBox="1"/>
-          <p:nvPr/>
-        </p:nvSpPr>
-        <p:spPr>
-          <a:xfrm>
-            <a:off x="7104888" y="4983480"/>
-            <a:ext cx="1417320" cy="502920"/>
-          </a:xfrm>
-          <a:prstGeom prst="rect">
-            <a:avLst/>
-          </a:prstGeom>
-          <a:noFill/>
-          <a:ln/>
-        </p:spPr>
-        <p:txBody>
-          <a:bodyPr wrap="square" lIns="0" tIns="0" rIns="0" bIns="0" rtlCol="0" anchor="t"/>
-          <a:lstStyle/>
-          <a:p>
-            <a:pPr eaLnBrk="0" latinLnBrk="0" indent="0" marL="0">
-              <a:buNone/>
-            </a:pPr>
-            <a:r>
-              <a:rPr lang="ko-KR" altLang="en-US" sz="2200" b="1" dirty="0">
-                <a:solidFill>
-                  <a:srgbClr val="000000"/>
-                </a:solidFill>
-                <a:latin typeface="Malgun Gothic" pitchFamily="34" charset="0"/>
-                <a:ea typeface="Malgun Gothic" pitchFamily="34" charset="-122"/>
-                <a:cs typeface="Malgun Gothic" pitchFamily="34" charset="-120"/>
-              </a:rPr>
-              <a:t>74%</a:t>
-            </a:r>
-            <a:endParaRPr lang="ko-KR" altLang="en-US" sz="2200" dirty="0"/>
-          </a:p>
-        </p:txBody>
-      </p:sp>
-      <p:sp>
-        <p:nvSpPr>
-          <p:cNvPr id="24" name="Text 19"/>
-          <p:cNvSpPr txBox="1"/>
-          <p:nvPr/>
-        </p:nvSpPr>
-        <p:spPr>
-          <a:xfrm>
-            <a:off x="7104888" y="5468112"/>
-            <a:ext cx="1417320" cy="685800"/>
-          </a:xfrm>
-          <a:prstGeom prst="rect">
-            <a:avLst/>
-          </a:prstGeom>
-          <a:noFill/>
-          <a:ln/>
-        </p:spPr>
-        <p:txBody>
-          <a:bodyPr wrap="square" lIns="0" tIns="0" rIns="0" bIns="0" rtlCol="0" anchor="t"/>
-          <a:lstStyle/>
-          <a:p>
-            <a:pPr eaLnBrk="0" latinLnBrk="0" indent="0" marL="0">
-              <a:buNone/>
-            </a:pPr>
-            <a:r>
-              <a:rPr lang="ko-KR" altLang="en-US" sz="1100" dirty="0">
-                <a:solidFill>
-                  <a:srgbClr val="000000"/>
-                </a:solidFill>
-                <a:latin typeface="Malgun Gothic" pitchFamily="34" charset="0"/>
-                <a:ea typeface="Malgun Gothic" pitchFamily="34" charset="-122"/>
-                <a:cs typeface="Malgun Gothic" pitchFamily="34" charset="-120"/>
-              </a:rPr>
-              <a:t>읍·면 35% 할증 불합리</a:t>
-            </a:r>
-            <a:endParaRPr lang="ko-KR" altLang="en-US" sz="1100" dirty="0"/>
-          </a:p>
-        </p:txBody>
-      </p:sp>
-      <p:sp>
-        <p:nvSpPr>
-          <p:cNvPr id="25" name="Text 20"/>
-          <p:cNvSpPr txBox="1"/>
-          <p:nvPr/>
-        </p:nvSpPr>
-        <p:spPr>
-          <a:xfrm>
-            <a:off x="8586216" y="4983480"/>
-            <a:ext cx="1417320" cy="502920"/>
-          </a:xfrm>
-          <a:prstGeom prst="rect">
-            <a:avLst/>
-          </a:prstGeom>
-          <a:noFill/>
-          <a:ln/>
-        </p:spPr>
-        <p:txBody>
-          <a:bodyPr wrap="square" lIns="0" tIns="0" rIns="0" bIns="0" rtlCol="0" anchor="t"/>
-          <a:lstStyle/>
-          <a:p>
-            <a:pPr eaLnBrk="0" latinLnBrk="0" indent="0" marL="0">
-              <a:buNone/>
-            </a:pPr>
-            <a:r>
-              <a:rPr lang="ko-KR" altLang="en-US" sz="2200" b="1" dirty="0">
-                <a:solidFill>
-                  <a:srgbClr val="000000"/>
-                </a:solidFill>
-                <a:latin typeface="Malgun Gothic" pitchFamily="34" charset="0"/>
-                <a:ea typeface="Malgun Gothic" pitchFamily="34" charset="-122"/>
-                <a:cs typeface="Malgun Gothic" pitchFamily="34" charset="-120"/>
-              </a:rPr>
-              <a:t>93%</a:t>
-            </a:r>
-            <a:endParaRPr lang="ko-KR" altLang="en-US" sz="2200" dirty="0"/>
-          </a:p>
-        </p:txBody>
-      </p:sp>
-      <p:sp>
-        <p:nvSpPr>
-          <p:cNvPr id="26" name="Text 21"/>
-          <p:cNvSpPr txBox="1"/>
-          <p:nvPr/>
-        </p:nvSpPr>
-        <p:spPr>
-          <a:xfrm>
-            <a:off x="8586216" y="5468112"/>
-            <a:ext cx="1417320" cy="685800"/>
-          </a:xfrm>
-          <a:prstGeom prst="rect">
-            <a:avLst/>
-          </a:prstGeom>
-          <a:noFill/>
-          <a:ln/>
-        </p:spPr>
-        <p:txBody>
-          <a:bodyPr wrap="square" lIns="0" tIns="0" rIns="0" bIns="0" rtlCol="0" anchor="t"/>
-          <a:lstStyle/>
-          <a:p>
-            <a:pPr eaLnBrk="0" latinLnBrk="0" indent="0" marL="0">
-              <a:buNone/>
-            </a:pPr>
-            <a:r>
-              <a:rPr lang="ko-KR" altLang="en-US" sz="1100" dirty="0">
-                <a:solidFill>
-                  <a:srgbClr val="000000"/>
-                </a:solidFill>
-                <a:latin typeface="Malgun Gothic" pitchFamily="34" charset="0"/>
-                <a:ea typeface="Malgun Gothic" pitchFamily="34" charset="-122"/>
-                <a:cs typeface="Malgun Gothic" pitchFamily="34" charset="-120"/>
-              </a:rPr>
-              <a:t>할증 없으면 이용 증가</a:t>
-            </a:r>
-            <a:endParaRPr lang="ko-KR" altLang="en-US" sz="1100" dirty="0"/>
-          </a:p>
-        </p:txBody>
-      </p:sp>
-      <p:sp>
-        <p:nvSpPr>
-          <p:cNvPr id="27" name="Text 22"/>
-          <p:cNvSpPr txBox="1"/>
-          <p:nvPr/>
-        </p:nvSpPr>
-        <p:spPr>
-          <a:xfrm>
-            <a:off x="10067544" y="4983480"/>
-            <a:ext cx="1417320" cy="502920"/>
-          </a:xfrm>
-          <a:prstGeom prst="rect">
-            <a:avLst/>
-          </a:prstGeom>
-          <a:noFill/>
-          <a:ln/>
-        </p:spPr>
-        <p:txBody>
-          <a:bodyPr wrap="square" lIns="0" tIns="0" rIns="0" bIns="0" rtlCol="0" anchor="t"/>
-          <a:lstStyle/>
-          <a:p>
-            <a:pPr eaLnBrk="0" latinLnBrk="0" indent="0" marL="0">
-              <a:buNone/>
-            </a:pPr>
-            <a:r>
-              <a:rPr lang="ko-KR" altLang="en-US" sz="2200" b="1" dirty="0">
-                <a:solidFill>
-                  <a:srgbClr val="1D9E75"/>
-                </a:solidFill>
-                <a:latin typeface="Malgun Gothic" pitchFamily="34" charset="0"/>
-                <a:ea typeface="Malgun Gothic" pitchFamily="34" charset="-122"/>
-                <a:cs typeface="Malgun Gothic" pitchFamily="34" charset="-120"/>
-              </a:rPr>
-              <a:t>96%</a:t>
-            </a:r>
-            <a:endParaRPr lang="ko-KR" altLang="en-US" sz="2200" dirty="0"/>
-          </a:p>
-        </p:txBody>
-      </p:sp>
-      <p:sp>
-        <p:nvSpPr>
-          <p:cNvPr id="28" name="Text 23"/>
-          <p:cNvSpPr txBox="1"/>
-          <p:nvPr/>
-        </p:nvSpPr>
-        <p:spPr>
-          <a:xfrm>
-            <a:off x="10067544" y="5468112"/>
-            <a:ext cx="1417320" cy="685800"/>
-          </a:xfrm>
-          <a:prstGeom prst="rect">
-            <a:avLst/>
-          </a:prstGeom>
-          <a:noFill/>
-          <a:ln/>
-        </p:spPr>
-        <p:txBody>
-          <a:bodyPr wrap="square" lIns="0" tIns="0" rIns="0" bIns="0" rtlCol="0" anchor="t"/>
-          <a:lstStyle/>
-          <a:p>
-            <a:pPr eaLnBrk="0" latinLnBrk="0" indent="0" marL="0">
-              <a:buNone/>
-            </a:pPr>
-            <a:r>
-              <a:rPr lang="ko-KR" altLang="en-US" sz="1100" dirty="0">
-                <a:solidFill>
-                  <a:srgbClr val="000000"/>
-                </a:solidFill>
-                <a:latin typeface="Malgun Gothic" pitchFamily="34" charset="0"/>
-                <a:ea typeface="Malgun Gothic" pitchFamily="34" charset="-122"/>
-                <a:cs typeface="Malgun Gothic" pitchFamily="34" charset="-120"/>
-              </a:rPr>
-              <a:t>조건부 나눠 타기 의향</a:t>
-            </a:r>
-            <a:endParaRPr lang="ko-KR" altLang="en-US" sz="1100" dirty="0"/>
-          </a:p>
-        </p:txBody>
-      </p:sp>
-      <p:sp>
-        <p:nvSpPr>
-          <p:cNvPr id="29" name="Text 24"/>
+      <p:graphicFrame>
+        <p:nvGraphicFramePr>
+          <p:cNvPr id="21" name="Chart 1" descr=""/>
+          <p:cNvGraphicFramePr/>
+          <p:nvPr/>
+        </p:nvGraphicFramePr>
+        <p:xfrm>
+          <a:off x="5577840" y="4956048"/>
+          <a:ext cx="5989320" cy="1261872"/>
+        </p:xfrm>
+        <a:graphic xmlns:a="http://schemas.openxmlformats.org/drawingml/2006/main">
+          <a:graphicData uri="http://schemas.openxmlformats.org/drawingml/2006/chart">
+            <c:chart xmlns:c="http://schemas.openxmlformats.org/drawingml/2006/chart" r:id="rId3"/>
+          </a:graphicData>
+        </a:graphic>
+      </p:graphicFrame>
+      <p:sp>
+        <p:nvSpPr>
+          <p:cNvPr id="22" name="Text 16"/>
           <p:cNvSpPr txBox="1"/>
           <p:nvPr/>
         </p:nvSpPr>
@@ -13557,7 +13540,7 @@
                 <a:ea typeface="Malgun Gothic" pitchFamily="34" charset="-122"/>
                 <a:cs typeface="Malgun Gothic" pitchFamily="34" charset="-120"/>
               </a:rPr>
-              <a:t>시범 → 제휴 → 거점 확대 → 고시 건의</a:t>
+              <a:t>1차 목표: 오송 귀로 매칭 하루 36건 (기사 10%·승객 앱 오송 집중 시뮬레이션) · 참여 기사 하루 +5,774원</a:t>
             </a:r>
             <a:endParaRPr lang="ko-KR" altLang="en-US" sz="1500" dirty="0"/>
           </a:p>

--- a/presentation/쉐어택_발표_v3.pptx
+++ b/presentation/쉐어택_발표_v3.pptx
@@ -2783,8 +2783,8 @@
         </p:nvSpPr>
         <p:spPr>
           <a:xfrm>
-            <a:off x="822960" y="3383280"/>
-            <a:ext cx="548640" cy="457200"/>
+            <a:off x="822960" y="3520440"/>
+            <a:ext cx="1828800" cy="594360"/>
           </a:xfrm>
           <a:prstGeom prst="rect">
             <a:avLst/>
@@ -2800,17 +2800,17 @@
               <a:buNone/>
             </a:pPr>
             <a:r>
-              <a:rPr lang="ko-KR" altLang="en-US" sz="2200" dirty="0">
-                <a:solidFill>
-                  <a:srgbClr val="000000"/>
-                </a:solidFill>
-                <a:latin typeface="Malgun Gothic" pitchFamily="34" charset="0"/>
-                <a:ea typeface="Malgun Gothic" pitchFamily="34" charset="-122"/>
-                <a:cs typeface="Malgun Gothic" pitchFamily="34" charset="-120"/>
-              </a:rPr>
-              <a:t>💸</a:t>
-            </a:r>
-            <a:endParaRPr lang="ko-KR" altLang="en-US" sz="2200" dirty="0"/>
+              <a:rPr lang="ko-KR" altLang="en-US" sz="3200" b="1" dirty="0">
+                <a:solidFill>
+                  <a:srgbClr val="F2A93B"/>
+                </a:solidFill>
+                <a:latin typeface="Malgun Gothic" pitchFamily="34" charset="0"/>
+                <a:ea typeface="Malgun Gothic" pitchFamily="34" charset="-122"/>
+                <a:cs typeface="Malgun Gothic" pitchFamily="34" charset="-120"/>
+              </a:rPr>
+              <a:t>35%</a:t>
+            </a:r>
+            <a:endParaRPr lang="ko-KR" altLang="en-US" sz="3200" dirty="0"/>
           </a:p>
         </p:txBody>
       </p:sp>
@@ -2822,8 +2822,8 @@
         </p:nvSpPr>
         <p:spPr>
           <a:xfrm>
-            <a:off x="822960" y="3840480"/>
-            <a:ext cx="1828800" cy="594360"/>
+            <a:off x="822960" y="4206240"/>
+            <a:ext cx="1828800" cy="640080"/>
           </a:xfrm>
           <a:prstGeom prst="rect">
             <a:avLst/>
@@ -2839,46 +2839,7 @@
               <a:buNone/>
             </a:pPr>
             <a:r>
-              <a:rPr lang="ko-KR" altLang="en-US" sz="3200" b="1" dirty="0">
-                <a:solidFill>
-                  <a:srgbClr val="F2A93B"/>
-                </a:solidFill>
-                <a:latin typeface="Malgun Gothic" pitchFamily="34" charset="0"/>
-                <a:ea typeface="Malgun Gothic" pitchFamily="34" charset="-122"/>
-                <a:cs typeface="Malgun Gothic" pitchFamily="34" charset="-120"/>
-              </a:rPr>
-              <a:t>35%</a:t>
-            </a:r>
-            <a:endParaRPr lang="ko-KR" altLang="en-US" sz="3200" dirty="0"/>
-          </a:p>
-        </p:txBody>
-      </p:sp>
-      <p:sp>
-        <p:nvSpPr>
-          <p:cNvPr id="11" name="Text 7"/>
-          <p:cNvSpPr txBox="1"/>
-          <p:nvPr/>
-        </p:nvSpPr>
-        <p:spPr>
-          <a:xfrm>
-            <a:off x="822960" y="4434840"/>
-            <a:ext cx="1828800" cy="548640"/>
-          </a:xfrm>
-          <a:prstGeom prst="rect">
-            <a:avLst/>
-          </a:prstGeom>
-          <a:noFill/>
-          <a:ln/>
-        </p:spPr>
-        <p:txBody>
-          <a:bodyPr wrap="square" lIns="0" tIns="0" rIns="0" bIns="0" rtlCol="0" anchor="t"/>
-          <a:lstStyle/>
-          <a:p>
-            <a:pPr eaLnBrk="0" latinLnBrk="0" indent="0" marL="0">
-              <a:buNone/>
-            </a:pPr>
-            <a:r>
-              <a:rPr lang="ko-KR" altLang="en-US" sz="1100" dirty="0">
+              <a:rPr lang="ko-KR" altLang="en-US" sz="1200" dirty="0">
                 <a:solidFill>
                   <a:srgbClr val="AFAFAF"/>
                 </a:solidFill>
@@ -2888,13 +2849,13 @@
               </a:rPr>
               <a:t>동↔읍·면 복합할증</a:t>
             </a:r>
-            <a:endParaRPr lang="ko-KR" altLang="en-US" sz="1100" dirty="0"/>
-          </a:p>
-        </p:txBody>
-      </p:sp>
-      <p:sp>
-        <p:nvSpPr>
-          <p:cNvPr id="12" name="Shape 8"/>
+            <a:endParaRPr lang="ko-KR" altLang="en-US" sz="1200" dirty="0"/>
+          </a:p>
+        </p:txBody>
+      </p:sp>
+      <p:sp>
+        <p:nvSpPr>
+          <p:cNvPr id="11" name="Shape 7"/>
           <p:cNvSpPr/>
           <p:nvPr/>
         </p:nvSpPr>
@@ -2921,14 +2882,53 @@
       </p:sp>
       <p:sp>
         <p:nvSpPr>
+          <p:cNvPr id="12" name="Text 8"/>
+          <p:cNvSpPr txBox="1"/>
+          <p:nvPr/>
+        </p:nvSpPr>
+        <p:spPr>
+          <a:xfrm>
+            <a:off x="3063240" y="3520440"/>
+            <a:ext cx="1828800" cy="594360"/>
+          </a:xfrm>
+          <a:prstGeom prst="rect">
+            <a:avLst/>
+          </a:prstGeom>
+          <a:noFill/>
+          <a:ln/>
+        </p:spPr>
+        <p:txBody>
+          <a:bodyPr wrap="square" lIns="0" tIns="0" rIns="0" bIns="0" rtlCol="0" anchor="t"/>
+          <a:lstStyle/>
+          <a:p>
+            <a:pPr eaLnBrk="0" latinLnBrk="0" indent="0" marL="0">
+              <a:buNone/>
+            </a:pPr>
+            <a:r>
+              <a:rPr lang="ko-KR" altLang="en-US" sz="3200" b="1" dirty="0">
+                <a:solidFill>
+                  <a:srgbClr val="FFFFFF"/>
+                </a:solidFill>
+                <a:latin typeface="Malgun Gothic" pitchFamily="34" charset="0"/>
+                <a:ea typeface="Malgun Gothic" pitchFamily="34" charset="-122"/>
+                <a:cs typeface="Malgun Gothic" pitchFamily="34" charset="-120"/>
+              </a:rPr>
+              <a:t>73%</a:t>
+            </a:r>
+            <a:endParaRPr lang="ko-KR" altLang="en-US" sz="3200" dirty="0"/>
+          </a:p>
+        </p:txBody>
+      </p:sp>
+      <p:sp>
+        <p:nvSpPr>
           <p:cNvPr id="13" name="Text 9"/>
           <p:cNvSpPr txBox="1"/>
           <p:nvPr/>
         </p:nvSpPr>
         <p:spPr>
           <a:xfrm>
-            <a:off x="3063240" y="3383280"/>
-            <a:ext cx="548640" cy="457200"/>
+            <a:off x="3063240" y="4206240"/>
+            <a:ext cx="1828800" cy="640080"/>
           </a:xfrm>
           <a:prstGeom prst="rect">
             <a:avLst/>
@@ -2944,85 +2944,7 @@
               <a:buNone/>
             </a:pPr>
             <a:r>
-              <a:rPr lang="ko-KR" altLang="en-US" sz="2200" dirty="0">
-                <a:solidFill>
-                  <a:srgbClr val="000000"/>
-                </a:solidFill>
-                <a:latin typeface="Malgun Gothic" pitchFamily="34" charset="0"/>
-                <a:ea typeface="Malgun Gothic" pitchFamily="34" charset="-122"/>
-                <a:cs typeface="Malgun Gothic" pitchFamily="34" charset="-120"/>
-              </a:rPr>
-              <a:t>📍</a:t>
-            </a:r>
-            <a:endParaRPr lang="ko-KR" altLang="en-US" sz="2200" dirty="0"/>
-          </a:p>
-        </p:txBody>
-      </p:sp>
-      <p:sp>
-        <p:nvSpPr>
-          <p:cNvPr id="14" name="Text 10"/>
-          <p:cNvSpPr txBox="1"/>
-          <p:nvPr/>
-        </p:nvSpPr>
-        <p:spPr>
-          <a:xfrm>
-            <a:off x="3063240" y="3840480"/>
-            <a:ext cx="1828800" cy="594360"/>
-          </a:xfrm>
-          <a:prstGeom prst="rect">
-            <a:avLst/>
-          </a:prstGeom>
-          <a:noFill/>
-          <a:ln/>
-        </p:spPr>
-        <p:txBody>
-          <a:bodyPr wrap="square" lIns="0" tIns="0" rIns="0" bIns="0" rtlCol="0" anchor="t"/>
-          <a:lstStyle/>
-          <a:p>
-            <a:pPr eaLnBrk="0" latinLnBrk="0" indent="0" marL="0">
-              <a:buNone/>
-            </a:pPr>
-            <a:r>
-              <a:rPr lang="ko-KR" altLang="en-US" sz="3200" b="1" dirty="0">
-                <a:solidFill>
-                  <a:srgbClr val="FFFFFF"/>
-                </a:solidFill>
-                <a:latin typeface="Malgun Gothic" pitchFamily="34" charset="0"/>
-                <a:ea typeface="Malgun Gothic" pitchFamily="34" charset="-122"/>
-                <a:cs typeface="Malgun Gothic" pitchFamily="34" charset="-120"/>
-              </a:rPr>
-              <a:t>73%</a:t>
-            </a:r>
-            <a:endParaRPr lang="ko-KR" altLang="en-US" sz="3200" dirty="0"/>
-          </a:p>
-        </p:txBody>
-      </p:sp>
-      <p:sp>
-        <p:nvSpPr>
-          <p:cNvPr id="15" name="Text 11"/>
-          <p:cNvSpPr txBox="1"/>
-          <p:nvPr/>
-        </p:nvSpPr>
-        <p:spPr>
-          <a:xfrm>
-            <a:off x="3063240" y="4434840"/>
-            <a:ext cx="1828800" cy="548640"/>
-          </a:xfrm>
-          <a:prstGeom prst="rect">
-            <a:avLst/>
-          </a:prstGeom>
-          <a:noFill/>
-          <a:ln/>
-        </p:spPr>
-        <p:txBody>
-          <a:bodyPr wrap="square" lIns="0" tIns="0" rIns="0" bIns="0" rtlCol="0" anchor="t"/>
-          <a:lstStyle/>
-          <a:p>
-            <a:pPr eaLnBrk="0" latinLnBrk="0" indent="0" marL="0">
-              <a:buNone/>
-            </a:pPr>
-            <a:r>
-              <a:rPr lang="ko-KR" altLang="en-US" sz="1100" dirty="0">
+              <a:rPr lang="ko-KR" altLang="en-US" sz="1200" dirty="0">
                 <a:solidFill>
                   <a:srgbClr val="AFAFAF"/>
                 </a:solidFill>
@@ -3032,14 +2954,14 @@
               </a:rPr>
               <a:t>읍·면 택시 승차 중</a:t>
             </a:r>
-            <a:endParaRPr lang="ko-KR" altLang="en-US" sz="1100" dirty="0"/>
-          </a:p>
-          <a:p>
-            <a:pPr eaLnBrk="0" latinLnBrk="0" indent="0" marL="0">
-              <a:buNone/>
-            </a:pPr>
-            <a:r>
-              <a:rPr lang="ko-KR" altLang="en-US" sz="1100" dirty="0">
+            <a:endParaRPr lang="ko-KR" altLang="en-US" sz="1200" dirty="0"/>
+          </a:p>
+          <a:p>
+            <a:pPr eaLnBrk="0" latinLnBrk="0" indent="0" marL="0">
+              <a:buNone/>
+            </a:pPr>
+            <a:r>
+              <a:rPr lang="ko-KR" altLang="en-US" sz="1200" dirty="0">
                 <a:solidFill>
                   <a:srgbClr val="AFAFAF"/>
                 </a:solidFill>
@@ -3049,13 +2971,13 @@
               </a:rPr>
               <a:t>오송·오창 비중</a:t>
             </a:r>
-            <a:endParaRPr lang="ko-KR" altLang="en-US" sz="1100" dirty="0"/>
-          </a:p>
-        </p:txBody>
-      </p:sp>
-      <p:sp>
-        <p:nvSpPr>
-          <p:cNvPr id="16" name="Shape 12"/>
+            <a:endParaRPr lang="ko-KR" altLang="en-US" sz="1200" dirty="0"/>
+          </a:p>
+        </p:txBody>
+      </p:sp>
+      <p:sp>
+        <p:nvSpPr>
+          <p:cNvPr id="14" name="Shape 10"/>
           <p:cNvSpPr/>
           <p:nvPr/>
         </p:nvSpPr>
@@ -3082,141 +3004,102 @@
       </p:sp>
       <p:sp>
         <p:nvSpPr>
+          <p:cNvPr id="15" name="Text 11"/>
+          <p:cNvSpPr txBox="1"/>
+          <p:nvPr/>
+        </p:nvSpPr>
+        <p:spPr>
+          <a:xfrm>
+            <a:off x="5303520" y="3520440"/>
+            <a:ext cx="1828800" cy="594360"/>
+          </a:xfrm>
+          <a:prstGeom prst="rect">
+            <a:avLst/>
+          </a:prstGeom>
+          <a:noFill/>
+          <a:ln/>
+        </p:spPr>
+        <p:txBody>
+          <a:bodyPr wrap="square" lIns="0" tIns="0" rIns="0" bIns="0" rtlCol="0" anchor="t"/>
+          <a:lstStyle/>
+          <a:p>
+            <a:pPr eaLnBrk="0" latinLnBrk="0" indent="0" marL="0">
+              <a:buNone/>
+            </a:pPr>
+            <a:r>
+              <a:rPr lang="ko-KR" altLang="en-US" sz="3200" b="1" dirty="0">
+                <a:solidFill>
+                  <a:srgbClr val="FFFFFF"/>
+                </a:solidFill>
+                <a:latin typeface="Malgun Gothic" pitchFamily="34" charset="0"/>
+                <a:ea typeface="Malgun Gothic" pitchFamily="34" charset="-122"/>
+                <a:cs typeface="Malgun Gothic" pitchFamily="34" charset="-120"/>
+              </a:rPr>
+              <a:t>46.5%</a:t>
+            </a:r>
+            <a:endParaRPr lang="ko-KR" altLang="en-US" sz="3200" dirty="0"/>
+          </a:p>
+        </p:txBody>
+      </p:sp>
+      <p:sp>
+        <p:nvSpPr>
+          <p:cNvPr id="16" name="Text 12"/>
+          <p:cNvSpPr txBox="1"/>
+          <p:nvPr/>
+        </p:nvSpPr>
+        <p:spPr>
+          <a:xfrm>
+            <a:off x="5303520" y="4206240"/>
+            <a:ext cx="1828800" cy="640080"/>
+          </a:xfrm>
+          <a:prstGeom prst="rect">
+            <a:avLst/>
+          </a:prstGeom>
+          <a:noFill/>
+          <a:ln/>
+        </p:spPr>
+        <p:txBody>
+          <a:bodyPr wrap="square" lIns="0" tIns="0" rIns="0" bIns="0" rtlCol="0" anchor="t"/>
+          <a:lstStyle/>
+          <a:p>
+            <a:pPr eaLnBrk="0" latinLnBrk="0" indent="0" marL="0">
+              <a:buNone/>
+            </a:pPr>
+            <a:r>
+              <a:rPr lang="ko-KR" altLang="en-US" sz="1200" dirty="0">
+                <a:solidFill>
+                  <a:srgbClr val="AFAFAF"/>
+                </a:solidFill>
+                <a:latin typeface="Malgun Gothic" pitchFamily="34" charset="0"/>
+                <a:ea typeface="Malgun Gothic" pitchFamily="34" charset="-122"/>
+                <a:cs typeface="Malgun Gothic" pitchFamily="34" charset="-120"/>
+              </a:rPr>
+              <a:t>청주 택시</a:t>
+            </a:r>
+            <a:endParaRPr lang="ko-KR" altLang="en-US" sz="1200" dirty="0"/>
+          </a:p>
+          <a:p>
+            <a:pPr eaLnBrk="0" latinLnBrk="0" indent="0" marL="0">
+              <a:buNone/>
+            </a:pPr>
+            <a:r>
+              <a:rPr lang="ko-KR" altLang="en-US" sz="1200" dirty="0">
+                <a:solidFill>
+                  <a:srgbClr val="AFAFAF"/>
+                </a:solidFill>
+                <a:latin typeface="Malgun Gothic" pitchFamily="34" charset="0"/>
+                <a:ea typeface="Malgun Gothic" pitchFamily="34" charset="-122"/>
+                <a:cs typeface="Malgun Gothic" pitchFamily="34" charset="-120"/>
+              </a:rPr>
+              <a:t>빈 차 주행 비율</a:t>
+            </a:r>
+            <a:endParaRPr lang="ko-KR" altLang="en-US" sz="1200" dirty="0"/>
+          </a:p>
+        </p:txBody>
+      </p:sp>
+      <p:sp>
+        <p:nvSpPr>
           <p:cNvPr id="17" name="Text 13"/>
-          <p:cNvSpPr txBox="1"/>
-          <p:nvPr/>
-        </p:nvSpPr>
-        <p:spPr>
-          <a:xfrm>
-            <a:off x="5303520" y="3383280"/>
-            <a:ext cx="548640" cy="457200"/>
-          </a:xfrm>
-          <a:prstGeom prst="rect">
-            <a:avLst/>
-          </a:prstGeom>
-          <a:noFill/>
-          <a:ln/>
-        </p:spPr>
-        <p:txBody>
-          <a:bodyPr wrap="square" lIns="0" tIns="0" rIns="0" bIns="0" rtlCol="0" anchor="t"/>
-          <a:lstStyle/>
-          <a:p>
-            <a:pPr eaLnBrk="0" latinLnBrk="0" indent="0" marL="0">
-              <a:buNone/>
-            </a:pPr>
-            <a:r>
-              <a:rPr lang="ko-KR" altLang="en-US" sz="2200" dirty="0">
-                <a:solidFill>
-                  <a:srgbClr val="000000"/>
-                </a:solidFill>
-                <a:latin typeface="Malgun Gothic" pitchFamily="34" charset="0"/>
-                <a:ea typeface="Malgun Gothic" pitchFamily="34" charset="-122"/>
-                <a:cs typeface="Malgun Gothic" pitchFamily="34" charset="-120"/>
-              </a:rPr>
-              <a:t>🚗</a:t>
-            </a:r>
-            <a:endParaRPr lang="ko-KR" altLang="en-US" sz="2200" dirty="0"/>
-          </a:p>
-        </p:txBody>
-      </p:sp>
-      <p:sp>
-        <p:nvSpPr>
-          <p:cNvPr id="18" name="Text 14"/>
-          <p:cNvSpPr txBox="1"/>
-          <p:nvPr/>
-        </p:nvSpPr>
-        <p:spPr>
-          <a:xfrm>
-            <a:off x="5303520" y="3840480"/>
-            <a:ext cx="1828800" cy="594360"/>
-          </a:xfrm>
-          <a:prstGeom prst="rect">
-            <a:avLst/>
-          </a:prstGeom>
-          <a:noFill/>
-          <a:ln/>
-        </p:spPr>
-        <p:txBody>
-          <a:bodyPr wrap="square" lIns="0" tIns="0" rIns="0" bIns="0" rtlCol="0" anchor="t"/>
-          <a:lstStyle/>
-          <a:p>
-            <a:pPr eaLnBrk="0" latinLnBrk="0" indent="0" marL="0">
-              <a:buNone/>
-            </a:pPr>
-            <a:r>
-              <a:rPr lang="ko-KR" altLang="en-US" sz="3200" b="1" dirty="0">
-                <a:solidFill>
-                  <a:srgbClr val="FFFFFF"/>
-                </a:solidFill>
-                <a:latin typeface="Malgun Gothic" pitchFamily="34" charset="0"/>
-                <a:ea typeface="Malgun Gothic" pitchFamily="34" charset="-122"/>
-                <a:cs typeface="Malgun Gothic" pitchFamily="34" charset="-120"/>
-              </a:rPr>
-              <a:t>46.5%</a:t>
-            </a:r>
-            <a:endParaRPr lang="ko-KR" altLang="en-US" sz="3200" dirty="0"/>
-          </a:p>
-        </p:txBody>
-      </p:sp>
-      <p:sp>
-        <p:nvSpPr>
-          <p:cNvPr id="19" name="Text 15"/>
-          <p:cNvSpPr txBox="1"/>
-          <p:nvPr/>
-        </p:nvSpPr>
-        <p:spPr>
-          <a:xfrm>
-            <a:off x="5303520" y="4434840"/>
-            <a:ext cx="1828800" cy="548640"/>
-          </a:xfrm>
-          <a:prstGeom prst="rect">
-            <a:avLst/>
-          </a:prstGeom>
-          <a:noFill/>
-          <a:ln/>
-        </p:spPr>
-        <p:txBody>
-          <a:bodyPr wrap="square" lIns="0" tIns="0" rIns="0" bIns="0" rtlCol="0" anchor="t"/>
-          <a:lstStyle/>
-          <a:p>
-            <a:pPr eaLnBrk="0" latinLnBrk="0" indent="0" marL="0">
-              <a:buNone/>
-            </a:pPr>
-            <a:r>
-              <a:rPr lang="ko-KR" altLang="en-US" sz="1100" dirty="0">
-                <a:solidFill>
-                  <a:srgbClr val="AFAFAF"/>
-                </a:solidFill>
-                <a:latin typeface="Malgun Gothic" pitchFamily="34" charset="0"/>
-                <a:ea typeface="Malgun Gothic" pitchFamily="34" charset="-122"/>
-                <a:cs typeface="Malgun Gothic" pitchFamily="34" charset="-120"/>
-              </a:rPr>
-              <a:t>청주 택시</a:t>
-            </a:r>
-            <a:endParaRPr lang="ko-KR" altLang="en-US" sz="1100" dirty="0"/>
-          </a:p>
-          <a:p>
-            <a:pPr eaLnBrk="0" latinLnBrk="0" indent="0" marL="0">
-              <a:buNone/>
-            </a:pPr>
-            <a:r>
-              <a:rPr lang="ko-KR" altLang="en-US" sz="1100" dirty="0">
-                <a:solidFill>
-                  <a:srgbClr val="AFAFAF"/>
-                </a:solidFill>
-                <a:latin typeface="Malgun Gothic" pitchFamily="34" charset="0"/>
-                <a:ea typeface="Malgun Gothic" pitchFamily="34" charset="-122"/>
-                <a:cs typeface="Malgun Gothic" pitchFamily="34" charset="-120"/>
-              </a:rPr>
-              <a:t>빈 차 주행 비율</a:t>
-            </a:r>
-            <a:endParaRPr lang="ko-KR" altLang="en-US" sz="1100" dirty="0"/>
-          </a:p>
-        </p:txBody>
-      </p:sp>
-      <p:sp>
-        <p:nvSpPr>
-          <p:cNvPr id="20" name="Text 16"/>
           <p:cNvSpPr txBox="1"/>
           <p:nvPr/>
         </p:nvSpPr>
@@ -3236,10 +3119,13 @@
           <a:lstStyle/>
           <a:p>
             <a:pPr eaLnBrk="0" latinLnBrk="0" indent="0" marL="0">
-              <a:buNone/>
-            </a:pPr>
-            <a:r>
-              <a:rPr lang="ko-KR" altLang="en-US" sz="1250" i="1" dirty="0">
+              <a:lnSpc>
+                <a:spcPct val="120000"/>
+              </a:lnSpc>
+              <a:buNone/>
+            </a:pPr>
+            <a:r>
+              <a:rPr lang="ko-KR" altLang="en-US" sz="1400" dirty="0">
                 <a:solidFill>
                   <a:srgbClr val="FFFFFF"/>
                 </a:solidFill>
@@ -3249,13 +3135,13 @@
               </a:rPr>
               <a:t>할증은 빈 차로 돌아오는 손실을 메우기 위한 것. 그렇다면 빈 차를 채우면, 할증의 이유도 사라지지 않을까?</a:t>
             </a:r>
-            <a:endParaRPr lang="ko-KR" altLang="en-US" sz="1250" dirty="0"/>
-          </a:p>
-        </p:txBody>
-      </p:sp>
-      <p:sp>
-        <p:nvSpPr>
-          <p:cNvPr id="21" name="Shape 17"/>
+            <a:endParaRPr lang="ko-KR" altLang="en-US" sz="1400" dirty="0"/>
+          </a:p>
+        </p:txBody>
+      </p:sp>
+      <p:sp>
+        <p:nvSpPr>
+          <p:cNvPr id="18" name="Shape 14"/>
           <p:cNvSpPr/>
           <p:nvPr/>
         </p:nvSpPr>
@@ -3282,7 +3168,7 @@
       </p:sp>
       <p:sp>
         <p:nvSpPr>
-          <p:cNvPr id="22" name="Text 18"/>
+          <p:cNvPr id="19" name="Text 15"/>
           <p:cNvSpPr txBox="1"/>
           <p:nvPr/>
         </p:nvSpPr>
@@ -3305,7 +3191,7 @@
               <a:buNone/>
             </a:pPr>
             <a:r>
-              <a:rPr lang="ko-KR" altLang="en-US" sz="1400" b="1" dirty="0">
+              <a:rPr lang="ko-KR" altLang="en-US" sz="1500" b="1" dirty="0">
                 <a:solidFill>
                   <a:srgbClr val="1D9E75"/>
                 </a:solidFill>
@@ -3313,15 +3199,15 @@
                 <a:ea typeface="Malgun Gothic" pitchFamily="34" charset="-122"/>
                 <a:cs typeface="Malgun Gothic" pitchFamily="34" charset="-120"/>
               </a:rPr>
-              <a:t>CONTENTS</a:t>
-            </a:r>
-            <a:endParaRPr lang="ko-KR" altLang="en-US" sz="1400" dirty="0"/>
-          </a:p>
-        </p:txBody>
-      </p:sp>
-      <p:sp>
-        <p:nvSpPr>
-          <p:cNvPr id="23" name="Text 19"/>
+              <a:t>목차</a:t>
+            </a:r>
+            <a:endParaRPr lang="ko-KR" altLang="en-US" sz="1500" dirty="0"/>
+          </a:p>
+        </p:txBody>
+      </p:sp>
+      <p:sp>
+        <p:nvSpPr>
+          <p:cNvPr id="20" name="Text 16"/>
           <p:cNvSpPr txBox="1"/>
           <p:nvPr/>
         </p:nvSpPr>
@@ -3360,7 +3246,7 @@
       </p:sp>
       <p:sp>
         <p:nvSpPr>
-          <p:cNvPr id="24" name="Shape 20"/>
+          <p:cNvPr id="21" name="Shape 17"/>
           <p:cNvSpPr/>
           <p:nvPr/>
         </p:nvSpPr>
@@ -3383,7 +3269,7 @@
       </p:sp>
       <p:sp>
         <p:nvSpPr>
-          <p:cNvPr id="25" name="Text 21"/>
+          <p:cNvPr id="22" name="Text 18"/>
           <p:cNvSpPr txBox="1"/>
           <p:nvPr/>
         </p:nvSpPr>
@@ -3422,7 +3308,7 @@
       </p:sp>
       <p:sp>
         <p:nvSpPr>
-          <p:cNvPr id="26" name="Shape 22"/>
+          <p:cNvPr id="23" name="Shape 19"/>
           <p:cNvSpPr/>
           <p:nvPr/>
         </p:nvSpPr>
@@ -3445,7 +3331,7 @@
       </p:sp>
       <p:sp>
         <p:nvSpPr>
-          <p:cNvPr id="27" name="Text 23"/>
+          <p:cNvPr id="24" name="Text 20"/>
           <p:cNvSpPr txBox="1"/>
           <p:nvPr/>
         </p:nvSpPr>
@@ -3484,7 +3370,7 @@
       </p:sp>
       <p:sp>
         <p:nvSpPr>
-          <p:cNvPr id="28" name="Shape 24"/>
+          <p:cNvPr id="25" name="Shape 21"/>
           <p:cNvSpPr/>
           <p:nvPr/>
         </p:nvSpPr>
@@ -3507,7 +3393,7 @@
       </p:sp>
       <p:sp>
         <p:nvSpPr>
-          <p:cNvPr id="29" name="Text 25"/>
+          <p:cNvPr id="26" name="Text 22"/>
           <p:cNvSpPr txBox="1"/>
           <p:nvPr/>
         </p:nvSpPr>
@@ -3546,7 +3432,7 @@
       </p:sp>
       <p:sp>
         <p:nvSpPr>
-          <p:cNvPr id="30" name="Shape 26"/>
+          <p:cNvPr id="27" name="Shape 23"/>
           <p:cNvSpPr/>
           <p:nvPr/>
         </p:nvSpPr>
@@ -3569,7 +3455,7 @@
       </p:sp>
       <p:sp>
         <p:nvSpPr>
-          <p:cNvPr id="31" name="Text 27"/>
+          <p:cNvPr id="28" name="Text 24"/>
           <p:cNvSpPr txBox="1"/>
           <p:nvPr/>
         </p:nvSpPr>
@@ -3608,7 +3494,7 @@
       </p:sp>
       <p:sp>
         <p:nvSpPr>
-          <p:cNvPr id="32" name="Shape 28"/>
+          <p:cNvPr id="29" name="Shape 25"/>
           <p:cNvSpPr/>
           <p:nvPr/>
         </p:nvSpPr>
@@ -3631,7 +3517,7 @@
       </p:sp>
       <p:sp>
         <p:nvSpPr>
-          <p:cNvPr id="33" name="Text 29"/>
+          <p:cNvPr id="30" name="Text 26"/>
           <p:cNvSpPr txBox="1"/>
           <p:nvPr/>
         </p:nvSpPr>
@@ -3670,7 +3556,7 @@
       </p:sp>
       <p:sp>
         <p:nvSpPr>
-          <p:cNvPr id="34" name="Shape 30"/>
+          <p:cNvPr id="31" name="Shape 27"/>
           <p:cNvSpPr/>
           <p:nvPr/>
         </p:nvSpPr>
@@ -3693,7 +3579,7 @@
       </p:sp>
       <p:sp>
         <p:nvSpPr>
-          <p:cNvPr id="35" name="Text 31"/>
+          <p:cNvPr id="32" name="Text 28"/>
           <p:cNvSpPr txBox="1"/>
           <p:nvPr/>
         </p:nvSpPr>
@@ -3732,7 +3618,7 @@
       </p:sp>
       <p:sp>
         <p:nvSpPr>
-          <p:cNvPr id="36" name="Shape 32"/>
+          <p:cNvPr id="33" name="Shape 29"/>
           <p:cNvSpPr/>
           <p:nvPr/>
         </p:nvSpPr>
@@ -3755,7 +3641,7 @@
       </p:sp>
       <p:sp>
         <p:nvSpPr>
-          <p:cNvPr id="37" name="Text 33"/>
+          <p:cNvPr id="34" name="Text 30"/>
           <p:cNvSpPr txBox="1"/>
           <p:nvPr/>
         </p:nvSpPr>
@@ -4181,7 +4067,7 @@
               <a:buNone/>
             </a:pPr>
             <a:r>
-              <a:rPr lang="ko-KR" altLang="en-US" sz="1150" i="1" dirty="0">
+              <a:rPr lang="ko-KR" altLang="en-US" sz="1200" dirty="0">
                 <a:solidFill>
                   <a:srgbClr val="000000"/>
                 </a:solidFill>
@@ -4191,7 +4077,7 @@
               </a:rPr>
               <a:t>"같은 청주인데 오송역만 가면 택시비가 확 뛰어요"</a:t>
             </a:r>
-            <a:endParaRPr lang="ko-KR" altLang="en-US" sz="1150" dirty="0"/>
+            <a:endParaRPr lang="ko-KR" altLang="en-US" sz="1200" dirty="0"/>
           </a:p>
         </p:txBody>
       </p:sp>
@@ -4216,9 +4102,8 @@
           <a:bodyPr wrap="square" lIns="0" tIns="0" rIns="0" bIns="0" rtlCol="0" anchor="t"/>
           <a:lstStyle/>
           <a:p>
-            <a:pPr eaLnBrk="0" latinLnBrk="0" marL="342900" indent="-342900">
-              <a:buSzPct val="100000"/>
-              <a:buChar char="•"/>
+            <a:pPr eaLnBrk="0" latinLnBrk="0" indent="0" marL="0">
+              <a:buNone/>
             </a:pPr>
             <a:r>
               <a:rPr lang="ko-KR" altLang="en-US" sz="1400" dirty="0">
@@ -4234,9 +4119,8 @@
             <a:endParaRPr lang="ko-KR" altLang="en-US" sz="1400" dirty="0"/>
           </a:p>
           <a:p>
-            <a:pPr eaLnBrk="0" latinLnBrk="0" marL="342900" indent="-342900">
-              <a:buSzPct val="100000"/>
-              <a:buChar char="•"/>
+            <a:pPr eaLnBrk="0" latinLnBrk="0" indent="0" marL="0">
+              <a:buNone/>
             </a:pPr>
             <a:r>
               <a:rPr lang="ko-KR" altLang="en-US" sz="1400" dirty="0">
@@ -4449,7 +4333,7 @@
               <a:buNone/>
             </a:pPr>
             <a:r>
-              <a:rPr lang="ko-KR" altLang="en-US" sz="1150" i="1" dirty="0">
+              <a:rPr lang="ko-KR" altLang="en-US" sz="1200" dirty="0">
                 <a:solidFill>
                   <a:srgbClr val="000000"/>
                 </a:solidFill>
@@ -4459,7 +4343,7 @@
               </a:rPr>
               <a:t>"오송에 손님 내려 주면, 돌아올 땐 빈 차일 때가 많죠"</a:t>
             </a:r>
-            <a:endParaRPr lang="ko-KR" altLang="en-US" sz="1150" dirty="0"/>
+            <a:endParaRPr lang="ko-KR" altLang="en-US" sz="1200" dirty="0"/>
           </a:p>
         </p:txBody>
       </p:sp>
@@ -4484,9 +4368,8 @@
           <a:bodyPr wrap="square" lIns="0" tIns="0" rIns="0" bIns="0" rtlCol="0" anchor="t"/>
           <a:lstStyle/>
           <a:p>
-            <a:pPr eaLnBrk="0" latinLnBrk="0" marL="342900" indent="-342900">
-              <a:buSzPct val="100000"/>
-              <a:buChar char="•"/>
+            <a:pPr eaLnBrk="0" latinLnBrk="0" indent="0" marL="0">
+              <a:buNone/>
             </a:pPr>
             <a:r>
               <a:rPr lang="ko-KR" altLang="en-US" sz="1400" dirty="0">
@@ -4502,9 +4385,8 @@
             <a:endParaRPr lang="ko-KR" altLang="en-US" sz="1400" dirty="0"/>
           </a:p>
           <a:p>
-            <a:pPr eaLnBrk="0" latinLnBrk="0" marL="342900" indent="-342900">
-              <a:buSzPct val="100000"/>
-              <a:buChar char="•"/>
+            <a:pPr eaLnBrk="0" latinLnBrk="0" indent="0" marL="0">
+              <a:buNone/>
             </a:pPr>
             <a:r>
               <a:rPr lang="ko-KR" altLang="en-US" sz="1400" dirty="0">
@@ -4557,7 +4439,7 @@
         <p:spPr>
           <a:xfrm>
             <a:off x="731520" y="3950208"/>
-            <a:ext cx="5486400" cy="320040"/>
+            <a:ext cx="7315200" cy="320040"/>
           </a:xfrm>
           <a:prstGeom prst="rect">
             <a:avLst/>
@@ -4575,13 +4457,55 @@
             <a:r>
               <a:rPr lang="ko-KR" altLang="en-US" sz="1300" b="1" dirty="0">
                 <a:solidFill>
+                  <a:srgbClr val="000000"/>
+                </a:solidFill>
+                <a:latin typeface="Malgun Gothic" pitchFamily="34" charset="0"/>
+                <a:ea typeface="Malgun Gothic" pitchFamily="34" charset="-122"/>
+                <a:cs typeface="Malgun Gothic" pitchFamily="34" charset="-120"/>
+              </a:rPr>
+              <a:t>손님 여정  </a:t>
+            </a:r>
+            <a:pPr eaLnBrk="0" latinLnBrk="0" indent="0" marL="0">
+              <a:buNone/>
+            </a:pPr>
+            <a:r>
+              <a:rPr lang="ko-KR" altLang="en-US" sz="1300" b="1" dirty="0">
+                <a:solidFill>
+                  <a:srgbClr val="5E5E5E"/>
+                </a:solidFill>
+                <a:latin typeface="Malgun Gothic" pitchFamily="34" charset="0"/>
+                <a:ea typeface="Malgun Gothic" pitchFamily="34" charset="-122"/>
+                <a:cs typeface="Malgun Gothic" pitchFamily="34" charset="-120"/>
+              </a:rPr>
+              <a:t>지금</a:t>
+            </a:r>
+            <a:pPr eaLnBrk="0" latinLnBrk="0" indent="0" marL="0">
+              <a:buNone/>
+            </a:pPr>
+            <a:r>
+              <a:rPr lang="ko-KR" altLang="en-US" sz="1300" b="1" dirty="0">
+                <a:solidFill>
+                  <a:srgbClr val="AFAFAF"/>
+                </a:solidFill>
+                <a:latin typeface="Malgun Gothic" pitchFamily="34" charset="0"/>
+                <a:ea typeface="Malgun Gothic" pitchFamily="34" charset="-122"/>
+                <a:cs typeface="Malgun Gothic" pitchFamily="34" charset="-120"/>
+              </a:rPr>
+              <a:t>  →  </a:t>
+            </a:r>
+            <a:pPr eaLnBrk="0" latinLnBrk="0" indent="0" marL="0">
+              <a:buNone/>
+            </a:pPr>
+            <a:r>
+              <a:rPr lang="ko-KR" altLang="en-US" sz="1300" b="1" dirty="0">
+                <a:solidFill>
                   <a:srgbClr val="1D9E75"/>
                 </a:solidFill>
                 <a:latin typeface="Malgun Gothic" pitchFamily="34" charset="0"/>
                 <a:ea typeface="Malgun Gothic" pitchFamily="34" charset="-122"/>
                 <a:cs typeface="Malgun Gothic" pitchFamily="34" charset="-120"/>
               </a:rPr>
-              <a:t>손님 여정  (지금 → 쉐어택)</a:t>
+              <a:t>쉐어택이 있으면</a:t>
             </a:r>
             <a:endParaRPr lang="ko-KR" altLang="en-US" sz="1300" dirty="0"/>
           </a:p>
@@ -4659,8 +4583,8 @@
         </p:nvSpPr>
         <p:spPr>
           <a:xfrm>
-            <a:off x="822960" y="5074920"/>
-            <a:ext cx="1645920" cy="274320"/>
+            <a:off x="731520" y="5047488"/>
+            <a:ext cx="1828800" cy="256032"/>
           </a:xfrm>
           <a:prstGeom prst="rect">
             <a:avLst/>
@@ -4678,7 +4602,7 @@
             <a:r>
               <a:rPr lang="ko-KR" altLang="en-US" sz="1100" dirty="0">
                 <a:solidFill>
-                  <a:srgbClr val="000000"/>
+                  <a:srgbClr val="5E5E5E"/>
                 </a:solidFill>
                 <a:latin typeface="Malgun Gothic" pitchFamily="34" charset="0"/>
                 <a:ea typeface="Malgun Gothic" pitchFamily="34" charset="-122"/>
@@ -4692,7 +4616,46 @@
       </p:sp>
       <p:sp>
         <p:nvSpPr>
-          <p:cNvPr id="26" name="Shape 23"/>
+          <p:cNvPr id="26" name="Text 23"/>
+          <p:cNvSpPr txBox="1"/>
+          <p:nvPr/>
+        </p:nvSpPr>
+        <p:spPr>
+          <a:xfrm>
+            <a:off x="731520" y="5303520"/>
+            <a:ext cx="1828800" cy="256032"/>
+          </a:xfrm>
+          <a:prstGeom prst="rect">
+            <a:avLst/>
+          </a:prstGeom>
+          <a:noFill/>
+          <a:ln/>
+        </p:spPr>
+        <p:txBody>
+          <a:bodyPr wrap="square" lIns="0" tIns="0" rIns="0" bIns="0" rtlCol="0" anchor="t"/>
+          <a:lstStyle/>
+          <a:p>
+            <a:pPr eaLnBrk="0" latinLnBrk="0" algn="ctr" indent="0" marL="0">
+              <a:buNone/>
+            </a:pPr>
+            <a:r>
+              <a:rPr lang="ko-KR" altLang="en-US" sz="1150" b="1" dirty="0">
+                <a:solidFill>
+                  <a:srgbClr val="1D9E75"/>
+                </a:solidFill>
+                <a:latin typeface="Malgun Gothic" pitchFamily="34" charset="0"/>
+                <a:ea typeface="Malgun Gothic" pitchFamily="34" charset="-122"/>
+                <a:cs typeface="Malgun Gothic" pitchFamily="34" charset="-120"/>
+              </a:rPr>
+              <a:t>도착 시각 맞춤 모집</a:t>
+            </a:r>
+            <a:endParaRPr lang="ko-KR" altLang="en-US" sz="1150" dirty="0"/>
+          </a:p>
+        </p:txBody>
+      </p:sp>
+      <p:sp>
+        <p:nvSpPr>
+          <p:cNvPr id="27" name="Shape 24"/>
           <p:cNvSpPr/>
           <p:nvPr/>
         </p:nvSpPr>
@@ -4716,7 +4679,7 @@
       </p:sp>
       <p:sp>
         <p:nvSpPr>
-          <p:cNvPr id="27" name="Shape 24"/>
+          <p:cNvPr id="28" name="Shape 25"/>
           <p:cNvSpPr/>
           <p:nvPr/>
         </p:nvSpPr>
@@ -4741,7 +4704,7 @@
       </p:sp>
       <p:sp>
         <p:nvSpPr>
-          <p:cNvPr id="28" name="Text 25"/>
+          <p:cNvPr id="29" name="Text 26"/>
           <p:cNvSpPr txBox="1"/>
           <p:nvPr/>
         </p:nvSpPr>
@@ -4780,14 +4743,14 @@
       </p:sp>
       <p:sp>
         <p:nvSpPr>
-          <p:cNvPr id="29" name="Text 26"/>
-          <p:cNvSpPr txBox="1"/>
-          <p:nvPr/>
-        </p:nvSpPr>
-        <p:spPr>
-          <a:xfrm>
-            <a:off x="2999232" y="5074920"/>
-            <a:ext cx="1645920" cy="274320"/>
+          <p:cNvPr id="30" name="Text 27"/>
+          <p:cNvSpPr txBox="1"/>
+          <p:nvPr/>
+        </p:nvSpPr>
+        <p:spPr>
+          <a:xfrm>
+            <a:off x="2907792" y="5047488"/>
+            <a:ext cx="1828800" cy="256032"/>
           </a:xfrm>
           <a:prstGeom prst="rect">
             <a:avLst/>
@@ -4805,7 +4768,7 @@
             <a:r>
               <a:rPr lang="ko-KR" altLang="en-US" sz="1100" dirty="0">
                 <a:solidFill>
-                  <a:srgbClr val="000000"/>
+                  <a:srgbClr val="5E5E5E"/>
                 </a:solidFill>
                 <a:latin typeface="Malgun Gothic" pitchFamily="34" charset="0"/>
                 <a:ea typeface="Malgun Gothic" pitchFamily="34" charset="-122"/>
@@ -4819,7 +4782,46 @@
       </p:sp>
       <p:sp>
         <p:nvSpPr>
-          <p:cNvPr id="30" name="Shape 27"/>
+          <p:cNvPr id="31" name="Text 28"/>
+          <p:cNvSpPr txBox="1"/>
+          <p:nvPr/>
+        </p:nvSpPr>
+        <p:spPr>
+          <a:xfrm>
+            <a:off x="2907792" y="5303520"/>
+            <a:ext cx="1828800" cy="256032"/>
+          </a:xfrm>
+          <a:prstGeom prst="rect">
+            <a:avLst/>
+          </a:prstGeom>
+          <a:noFill/>
+          <a:ln/>
+        </p:spPr>
+        <p:txBody>
+          <a:bodyPr wrap="square" lIns="0" tIns="0" rIns="0" bIns="0" rtlCol="0" anchor="t"/>
+          <a:lstStyle/>
+          <a:p>
+            <a:pPr eaLnBrk="0" latinLnBrk="0" algn="ctr" indent="0" marL="0">
+              <a:buNone/>
+            </a:pPr>
+            <a:r>
+              <a:rPr lang="ko-KR" altLang="en-US" sz="1150" b="1" dirty="0">
+                <a:solidFill>
+                  <a:srgbClr val="1D9E75"/>
+                </a:solidFill>
+                <a:latin typeface="Malgun Gothic" pitchFamily="34" charset="0"/>
+                <a:ea typeface="Malgun Gothic" pitchFamily="34" charset="-122"/>
+                <a:cs typeface="Malgun Gothic" pitchFamily="34" charset="-120"/>
+              </a:rPr>
+              <a:t>돌아가는 택시 확인</a:t>
+            </a:r>
+            <a:endParaRPr lang="ko-KR" altLang="en-US" sz="1150" dirty="0"/>
+          </a:p>
+        </p:txBody>
+      </p:sp>
+      <p:sp>
+        <p:nvSpPr>
+          <p:cNvPr id="32" name="Shape 29"/>
           <p:cNvSpPr/>
           <p:nvPr/>
         </p:nvSpPr>
@@ -4843,7 +4845,7 @@
       </p:sp>
       <p:sp>
         <p:nvSpPr>
-          <p:cNvPr id="31" name="Shape 28"/>
+          <p:cNvPr id="33" name="Shape 30"/>
           <p:cNvSpPr/>
           <p:nvPr/>
         </p:nvSpPr>
@@ -4868,7 +4870,7 @@
       </p:sp>
       <p:sp>
         <p:nvSpPr>
-          <p:cNvPr id="32" name="Text 29"/>
+          <p:cNvPr id="34" name="Text 31"/>
           <p:cNvSpPr txBox="1"/>
           <p:nvPr/>
         </p:nvSpPr>
@@ -4907,14 +4909,14 @@
       </p:sp>
       <p:sp>
         <p:nvSpPr>
-          <p:cNvPr id="33" name="Text 30"/>
-          <p:cNvSpPr txBox="1"/>
-          <p:nvPr/>
-        </p:nvSpPr>
-        <p:spPr>
-          <a:xfrm>
-            <a:off x="5175504" y="5074920"/>
-            <a:ext cx="1645920" cy="274320"/>
+          <p:cNvPr id="35" name="Text 32"/>
+          <p:cNvSpPr txBox="1"/>
+          <p:nvPr/>
+        </p:nvSpPr>
+        <p:spPr>
+          <a:xfrm>
+            <a:off x="5084064" y="5047488"/>
+            <a:ext cx="1828800" cy="256032"/>
           </a:xfrm>
           <a:prstGeom prst="rect">
             <a:avLst/>
@@ -4932,7 +4934,7 @@
             <a:r>
               <a:rPr lang="ko-KR" altLang="en-US" sz="1100" dirty="0">
                 <a:solidFill>
-                  <a:srgbClr val="000000"/>
+                  <a:srgbClr val="5E5E5E"/>
                 </a:solidFill>
                 <a:latin typeface="Malgun Gothic" pitchFamily="34" charset="0"/>
                 <a:ea typeface="Malgun Gothic" pitchFamily="34" charset="-122"/>
@@ -4946,7 +4948,46 @@
       </p:sp>
       <p:sp>
         <p:nvSpPr>
-          <p:cNvPr id="34" name="Shape 31"/>
+          <p:cNvPr id="36" name="Text 33"/>
+          <p:cNvSpPr txBox="1"/>
+          <p:nvPr/>
+        </p:nvSpPr>
+        <p:spPr>
+          <a:xfrm>
+            <a:off x="5084064" y="5303520"/>
+            <a:ext cx="1828800" cy="256032"/>
+          </a:xfrm>
+          <a:prstGeom prst="rect">
+            <a:avLst/>
+          </a:prstGeom>
+          <a:noFill/>
+          <a:ln/>
+        </p:spPr>
+        <p:txBody>
+          <a:bodyPr wrap="square" lIns="0" tIns="0" rIns="0" bIns="0" rtlCol="0" anchor="t"/>
+          <a:lstStyle/>
+          <a:p>
+            <a:pPr eaLnBrk="0" latinLnBrk="0" algn="ctr" indent="0" marL="0">
+              <a:buNone/>
+            </a:pPr>
+            <a:r>
+              <a:rPr lang="ko-KR" altLang="en-US" sz="1150" b="1" dirty="0">
+                <a:solidFill>
+                  <a:srgbClr val="1D9E75"/>
+                </a:solidFill>
+                <a:latin typeface="Malgun Gothic" pitchFamily="34" charset="0"/>
+                <a:ea typeface="Malgun Gothic" pitchFamily="34" charset="-122"/>
+                <a:cs typeface="Malgun Gothic" pitchFamily="34" charset="-120"/>
+              </a:rPr>
+              <a:t>할증 없는 요금 확인</a:t>
+            </a:r>
+            <a:endParaRPr lang="ko-KR" altLang="en-US" sz="1150" dirty="0"/>
+          </a:p>
+        </p:txBody>
+      </p:sp>
+      <p:sp>
+        <p:nvSpPr>
+          <p:cNvPr id="37" name="Shape 34"/>
           <p:cNvSpPr/>
           <p:nvPr/>
         </p:nvSpPr>
@@ -4970,7 +5011,7 @@
       </p:sp>
       <p:sp>
         <p:nvSpPr>
-          <p:cNvPr id="35" name="Shape 32"/>
+          <p:cNvPr id="38" name="Shape 35"/>
           <p:cNvSpPr/>
           <p:nvPr/>
         </p:nvSpPr>
@@ -4995,7 +5036,7 @@
       </p:sp>
       <p:sp>
         <p:nvSpPr>
-          <p:cNvPr id="36" name="Text 33"/>
+          <p:cNvPr id="39" name="Text 36"/>
           <p:cNvSpPr txBox="1"/>
           <p:nvPr/>
         </p:nvSpPr>
@@ -5034,14 +5075,14 @@
       </p:sp>
       <p:sp>
         <p:nvSpPr>
-          <p:cNvPr id="37" name="Text 34"/>
-          <p:cNvSpPr txBox="1"/>
-          <p:nvPr/>
-        </p:nvSpPr>
-        <p:spPr>
-          <a:xfrm>
-            <a:off x="7351776" y="5074920"/>
-            <a:ext cx="1645920" cy="274320"/>
+          <p:cNvPr id="40" name="Text 37"/>
+          <p:cNvSpPr txBox="1"/>
+          <p:nvPr/>
+        </p:nvSpPr>
+        <p:spPr>
+          <a:xfrm>
+            <a:off x="7260336" y="5047488"/>
+            <a:ext cx="1828800" cy="256032"/>
           </a:xfrm>
           <a:prstGeom prst="rect">
             <a:avLst/>
@@ -5059,7 +5100,7 @@
             <a:r>
               <a:rPr lang="ko-KR" altLang="en-US" sz="1100" dirty="0">
                 <a:solidFill>
-                  <a:srgbClr val="000000"/>
+                  <a:srgbClr val="5E5E5E"/>
                 </a:solidFill>
                 <a:latin typeface="Malgun Gothic" pitchFamily="34" charset="0"/>
                 <a:ea typeface="Malgun Gothic" pitchFamily="34" charset="-122"/>
@@ -5073,7 +5114,46 @@
       </p:sp>
       <p:sp>
         <p:nvSpPr>
-          <p:cNvPr id="38" name="Shape 35"/>
+          <p:cNvPr id="41" name="Text 38"/>
+          <p:cNvSpPr txBox="1"/>
+          <p:nvPr/>
+        </p:nvSpPr>
+        <p:spPr>
+          <a:xfrm>
+            <a:off x="7260336" y="5303520"/>
+            <a:ext cx="1828800" cy="256032"/>
+          </a:xfrm>
+          <a:prstGeom prst="rect">
+            <a:avLst/>
+          </a:prstGeom>
+          <a:noFill/>
+          <a:ln/>
+        </p:spPr>
+        <p:txBody>
+          <a:bodyPr wrap="square" lIns="0" tIns="0" rIns="0" bIns="0" rtlCol="0" anchor="t"/>
+          <a:lstStyle/>
+          <a:p>
+            <a:pPr eaLnBrk="0" latinLnBrk="0" algn="ctr" indent="0" marL="0">
+              <a:buNone/>
+            </a:pPr>
+            <a:r>
+              <a:rPr lang="ko-KR" altLang="en-US" sz="1150" b="1" dirty="0">
+                <a:solidFill>
+                  <a:srgbClr val="1D9E75"/>
+                </a:solidFill>
+                <a:latin typeface="Malgun Gothic" pitchFamily="34" charset="0"/>
+                <a:ea typeface="Malgun Gothic" pitchFamily="34" charset="-122"/>
+                <a:cs typeface="Malgun Gothic" pitchFamily="34" charset="-120"/>
+              </a:rPr>
+              <a:t>같은 방향끼리 탑승</a:t>
+            </a:r>
+            <a:endParaRPr lang="ko-KR" altLang="en-US" sz="1150" dirty="0"/>
+          </a:p>
+        </p:txBody>
+      </p:sp>
+      <p:sp>
+        <p:nvSpPr>
+          <p:cNvPr id="42" name="Shape 39"/>
           <p:cNvSpPr/>
           <p:nvPr/>
         </p:nvSpPr>
@@ -5097,7 +5177,7 @@
       </p:sp>
       <p:sp>
         <p:nvSpPr>
-          <p:cNvPr id="39" name="Shape 36"/>
+          <p:cNvPr id="43" name="Shape 40"/>
           <p:cNvSpPr/>
           <p:nvPr/>
         </p:nvSpPr>
@@ -5122,7 +5202,7 @@
       </p:sp>
       <p:sp>
         <p:nvSpPr>
-          <p:cNvPr id="40" name="Text 37"/>
+          <p:cNvPr id="44" name="Text 41"/>
           <p:cNvSpPr txBox="1"/>
           <p:nvPr/>
         </p:nvSpPr>
@@ -5161,14 +5241,14 @@
       </p:sp>
       <p:sp>
         <p:nvSpPr>
-          <p:cNvPr id="41" name="Text 38"/>
-          <p:cNvSpPr txBox="1"/>
-          <p:nvPr/>
-        </p:nvSpPr>
-        <p:spPr>
-          <a:xfrm>
-            <a:off x="9528048" y="5074920"/>
-            <a:ext cx="1645920" cy="274320"/>
+          <p:cNvPr id="45" name="Text 42"/>
+          <p:cNvSpPr txBox="1"/>
+          <p:nvPr/>
+        </p:nvSpPr>
+        <p:spPr>
+          <a:xfrm>
+            <a:off x="9436608" y="5047488"/>
+            <a:ext cx="1828800" cy="256032"/>
           </a:xfrm>
           <a:prstGeom prst="rect">
             <a:avLst/>
@@ -5186,7 +5266,7 @@
             <a:r>
               <a:rPr lang="ko-KR" altLang="en-US" sz="1100" dirty="0">
                 <a:solidFill>
-                  <a:srgbClr val="000000"/>
+                  <a:srgbClr val="5E5E5E"/>
                 </a:solidFill>
                 <a:latin typeface="Malgun Gothic" pitchFamily="34" charset="0"/>
                 <a:ea typeface="Malgun Gothic" pitchFamily="34" charset="-122"/>
@@ -5200,18 +5280,57 @@
       </p:sp>
       <p:sp>
         <p:nvSpPr>
-          <p:cNvPr id="42" name="Shape 39"/>
+          <p:cNvPr id="46" name="Text 43"/>
+          <p:cNvSpPr txBox="1"/>
+          <p:nvPr/>
+        </p:nvSpPr>
+        <p:spPr>
+          <a:xfrm>
+            <a:off x="9436608" y="5303520"/>
+            <a:ext cx="1828800" cy="256032"/>
+          </a:xfrm>
+          <a:prstGeom prst="rect">
+            <a:avLst/>
+          </a:prstGeom>
+          <a:noFill/>
+          <a:ln/>
+        </p:spPr>
+        <p:txBody>
+          <a:bodyPr wrap="square" lIns="0" tIns="0" rIns="0" bIns="0" rtlCol="0" anchor="t"/>
+          <a:lstStyle/>
+          <a:p>
+            <a:pPr eaLnBrk="0" latinLnBrk="0" algn="ctr" indent="0" marL="0">
+              <a:buNone/>
+            </a:pPr>
+            <a:r>
+              <a:rPr lang="ko-KR" altLang="en-US" sz="1150" b="1" dirty="0">
+                <a:solidFill>
+                  <a:srgbClr val="1D9E75"/>
+                </a:solidFill>
+                <a:latin typeface="Malgun Gothic" pitchFamily="34" charset="0"/>
+                <a:ea typeface="Malgun Gothic" pitchFamily="34" charset="-122"/>
+                <a:cs typeface="Malgun Gothic" pitchFamily="34" charset="-120"/>
+              </a:rPr>
+              <a:t>시내 도착 😊</a:t>
+            </a:r>
+            <a:endParaRPr lang="ko-KR" altLang="en-US" sz="1150" dirty="0"/>
+          </a:p>
+        </p:txBody>
+      </p:sp>
+      <p:sp>
+        <p:nvSpPr>
+          <p:cNvPr id="47" name="Shape 44"/>
           <p:cNvSpPr/>
           <p:nvPr/>
         </p:nvSpPr>
         <p:spPr>
           <a:xfrm>
-            <a:off x="731520" y="5486400"/>
-            <a:ext cx="10744200" cy="640080"/>
+            <a:off x="731520" y="5641848"/>
+            <a:ext cx="10744200" cy="502920"/>
           </a:xfrm>
           <a:prstGeom prst="roundRect">
             <a:avLst>
-              <a:gd name="adj" fmla="val 17143"/>
+              <a:gd name="adj" fmla="val 21818"/>
             </a:avLst>
           </a:prstGeom>
           <a:solidFill>
@@ -5227,14 +5346,14 @@
       </p:sp>
       <p:sp>
         <p:nvSpPr>
-          <p:cNvPr id="43" name="Text 40"/>
-          <p:cNvSpPr txBox="1"/>
-          <p:nvPr/>
-        </p:nvSpPr>
-        <p:spPr>
-          <a:xfrm>
-            <a:off x="914400" y="5486400"/>
-            <a:ext cx="10424160" cy="640080"/>
+          <p:cNvPr id="48" name="Text 45"/>
+          <p:cNvSpPr txBox="1"/>
+          <p:nvPr/>
+        </p:nvSpPr>
+        <p:spPr>
+          <a:xfrm>
+            <a:off x="914400" y="5641848"/>
+            <a:ext cx="10424160" cy="502920"/>
           </a:xfrm>
           <a:prstGeom prst="rect">
             <a:avLst/>
@@ -5266,7 +5385,7 @@
       </p:sp>
       <p:sp>
         <p:nvSpPr>
-          <p:cNvPr id="44" name="Text 41"/>
+          <p:cNvPr id="49" name="Text 46"/>
           <p:cNvSpPr txBox="1"/>
           <p:nvPr/>
         </p:nvSpPr>
@@ -5727,8 +5846,8 @@
         </p:nvSpPr>
         <p:spPr>
           <a:xfrm>
-            <a:off x="731520" y="3794760"/>
-            <a:ext cx="3017520" cy="1234440"/>
+            <a:off x="731520" y="3840480"/>
+            <a:ext cx="3017520" cy="1188720"/>
           </a:xfrm>
           <a:prstGeom prst="rect">
             <a:avLst/>
@@ -5742,12 +5861,12 @@
           <a:p>
             <a:pPr eaLnBrk="0" latinLnBrk="0" indent="0" marL="0">
               <a:lnSpc>
-                <a:spcPct val="115000"/>
+                <a:spcPct val="125000"/>
               </a:lnSpc>
               <a:buNone/>
             </a:pPr>
             <a:r>
-              <a:rPr lang="ko-KR" altLang="en-US" sz="1250" dirty="0">
+              <a:rPr lang="ko-KR" altLang="en-US" sz="1400" dirty="0">
                 <a:solidFill>
                   <a:srgbClr val="000000"/>
                 </a:solidFill>
@@ -5759,12 +5878,12 @@
             </a:r>
             <a:pPr eaLnBrk="0" latinLnBrk="0" indent="0" marL="0">
               <a:lnSpc>
-                <a:spcPct val="115000"/>
+                <a:spcPct val="125000"/>
               </a:lnSpc>
               <a:buNone/>
             </a:pPr>
             <a:r>
-              <a:rPr lang="ko-KR" altLang="en-US" sz="1250" b="1" dirty="0">
+              <a:rPr lang="ko-KR" altLang="en-US" sz="1400" b="1" dirty="0">
                 <a:solidFill>
                   <a:srgbClr val="1D9E75"/>
                 </a:solidFill>
@@ -5774,23 +5893,54 @@
               </a:rPr>
               <a:t>3,025건/일</a:t>
             </a:r>
+            <a:endParaRPr lang="ko-KR" altLang="en-US" sz="1400" dirty="0"/>
+          </a:p>
+          <a:p>
             <a:pPr eaLnBrk="0" latinLnBrk="0" indent="0" marL="0">
               <a:lnSpc>
-                <a:spcPct val="115000"/>
+                <a:spcPct val="125000"/>
               </a:lnSpc>
               <a:buNone/>
             </a:pPr>
-            <a:endParaRPr lang="ko-KR" altLang="en-US" sz="1250" dirty="0"/>
-          </a:p>
-          <a:p>
+            <a:r>
+              <a:rPr lang="ko-KR" altLang="en-US" sz="1400" dirty="0">
+                <a:solidFill>
+                  <a:srgbClr val="000000"/>
+                </a:solidFill>
+                <a:latin typeface="Malgun Gothic" pitchFamily="34" charset="0"/>
+                <a:ea typeface="Malgun Gothic" pitchFamily="34" charset="-122"/>
+                <a:cs typeface="Malgun Gothic" pitchFamily="34" charset="-120"/>
+              </a:rPr>
+              <a:t>오창읍 </a:t>
+            </a:r>
             <a:pPr eaLnBrk="0" latinLnBrk="0" indent="0" marL="0">
               <a:lnSpc>
-                <a:spcPct val="115000"/>
+                <a:spcPct val="125000"/>
               </a:lnSpc>
               <a:buNone/>
             </a:pPr>
             <a:r>
-              <a:rPr lang="ko-KR" altLang="en-US" sz="1250" dirty="0">
+              <a:rPr lang="ko-KR" altLang="en-US" sz="1400" b="1" dirty="0">
+                <a:solidFill>
+                  <a:srgbClr val="1D9E75"/>
+                </a:solidFill>
+                <a:latin typeface="Malgun Gothic" pitchFamily="34" charset="0"/>
+                <a:ea typeface="Malgun Gothic" pitchFamily="34" charset="-122"/>
+                <a:cs typeface="Malgun Gothic" pitchFamily="34" charset="-120"/>
+              </a:rPr>
+              <a:t>2,617건/일</a:t>
+            </a:r>
+            <a:endParaRPr lang="ko-KR" altLang="en-US" sz="1400" dirty="0"/>
+          </a:p>
+          <a:p>
+            <a:pPr eaLnBrk="0" latinLnBrk="0" indent="0" marL="0">
+              <a:lnSpc>
+                <a:spcPct val="125000"/>
+              </a:lnSpc>
+              <a:buNone/>
+            </a:pPr>
+            <a:r>
+              <a:rPr lang="ko-KR" altLang="en-US" sz="1400" dirty="0">
                 <a:solidFill>
                   <a:srgbClr val="000000"/>
                 </a:solidFill>
@@ -5798,45 +5948,33 @@
                 <a:ea typeface="Malgun Gothic" pitchFamily="34" charset="-122"/>
                 <a:cs typeface="Malgun Gothic" pitchFamily="34" charset="-120"/>
               </a:rPr>
-              <a:t>오창읍 </a:t>
-            </a:r>
-            <a:endParaRPr lang="ko-KR" altLang="en-US" sz="1250" dirty="0"/>
-          </a:p>
-          <a:p>
+              <a:t>오송역 승차의 </a:t>
+            </a:r>
             <a:pPr eaLnBrk="0" latinLnBrk="0" indent="0" marL="0">
               <a:lnSpc>
-                <a:spcPct val="115000"/>
+                <a:spcPct val="125000"/>
               </a:lnSpc>
               <a:buNone/>
             </a:pPr>
             <a:r>
-              <a:rPr lang="ko-KR" altLang="en-US" sz="1250" b="1" dirty="0">
-                <a:solidFill>
-                  <a:srgbClr val="1D9E75"/>
-                </a:solidFill>
-                <a:latin typeface="Malgun Gothic" pitchFamily="34" charset="0"/>
-                <a:ea typeface="Malgun Gothic" pitchFamily="34" charset="-122"/>
-                <a:cs typeface="Malgun Gothic" pitchFamily="34" charset="-120"/>
-              </a:rPr>
-              <a:t>2,617건/일</a:t>
+              <a:rPr lang="ko-KR" altLang="en-US" sz="1400" b="1" dirty="0">
+                <a:solidFill>
+                  <a:srgbClr val="F2A93B"/>
+                </a:solidFill>
+                <a:latin typeface="Malgun Gothic" pitchFamily="34" charset="0"/>
+                <a:ea typeface="Malgun Gothic" pitchFamily="34" charset="-122"/>
+                <a:cs typeface="Malgun Gothic" pitchFamily="34" charset="-120"/>
+              </a:rPr>
+              <a:t>52%</a:t>
             </a:r>
             <a:pPr eaLnBrk="0" latinLnBrk="0" indent="0" marL="0">
               <a:lnSpc>
-                <a:spcPct val="115000"/>
+                <a:spcPct val="125000"/>
               </a:lnSpc>
               <a:buNone/>
             </a:pPr>
-            <a:endParaRPr lang="ko-KR" altLang="en-US" sz="1250" dirty="0"/>
-          </a:p>
-          <a:p>
-            <a:pPr eaLnBrk="0" latinLnBrk="0" indent="0" marL="0">
-              <a:lnSpc>
-                <a:spcPct val="115000"/>
-              </a:lnSpc>
-              <a:buNone/>
-            </a:pPr>
-            <a:r>
-              <a:rPr lang="ko-KR" altLang="en-US" sz="1250" dirty="0">
+            <a:r>
+              <a:rPr lang="ko-KR" altLang="en-US" sz="1400" dirty="0">
                 <a:solidFill>
                   <a:srgbClr val="000000"/>
                 </a:solidFill>
@@ -5844,46 +5982,9 @@
                 <a:ea typeface="Malgun Gothic" pitchFamily="34" charset="-122"/>
                 <a:cs typeface="Malgun Gothic" pitchFamily="34" charset="-120"/>
               </a:rPr>
-              <a:t>오송역 승차의 </a:t>
-            </a:r>
-            <a:endParaRPr lang="ko-KR" altLang="en-US" sz="1250" dirty="0"/>
-          </a:p>
-          <a:p>
-            <a:pPr eaLnBrk="0" latinLnBrk="0" indent="0" marL="0">
-              <a:lnSpc>
-                <a:spcPct val="115000"/>
-              </a:lnSpc>
-              <a:buNone/>
-            </a:pPr>
-            <a:r>
-              <a:rPr lang="ko-KR" altLang="en-US" sz="1250" b="1" dirty="0">
-                <a:solidFill>
-                  <a:srgbClr val="F2A93B"/>
-                </a:solidFill>
-                <a:latin typeface="Malgun Gothic" pitchFamily="34" charset="0"/>
-                <a:ea typeface="Malgun Gothic" pitchFamily="34" charset="-122"/>
-                <a:cs typeface="Malgun Gothic" pitchFamily="34" charset="-120"/>
-              </a:rPr>
-              <a:t>52%</a:t>
-            </a:r>
-            <a:pPr eaLnBrk="0" latinLnBrk="0" indent="0" marL="0">
-              <a:lnSpc>
-                <a:spcPct val="115000"/>
-              </a:lnSpc>
-              <a:buNone/>
-            </a:pPr>
-            <a:r>
-              <a:rPr lang="ko-KR" altLang="en-US" sz="1250" dirty="0">
-                <a:solidFill>
-                  <a:srgbClr val="000000"/>
-                </a:solidFill>
-                <a:latin typeface="Malgun Gothic" pitchFamily="34" charset="0"/>
-                <a:ea typeface="Malgun Gothic" pitchFamily="34" charset="-122"/>
-                <a:cs typeface="Malgun Gothic" pitchFamily="34" charset="-120"/>
-              </a:rPr>
               <a:t>가 시내행</a:t>
             </a:r>
-            <a:endParaRPr lang="ko-KR" altLang="en-US" sz="1250" dirty="0"/>
+            <a:endParaRPr lang="ko-KR" altLang="en-US" sz="1400" dirty="0"/>
           </a:p>
         </p:txBody>
       </p:sp>
@@ -6023,14 +6124,212 @@
       </p:pic>
       <p:sp>
         <p:nvSpPr>
-          <p:cNvPr id="18" name="Text 14"/>
-          <p:cNvSpPr txBox="1"/>
-          <p:nvPr/>
-        </p:nvSpPr>
-        <p:spPr>
-          <a:xfrm>
-            <a:off x="4251960" y="4480560"/>
-            <a:ext cx="2971800" cy="1280160"/>
+          <p:cNvPr id="18" name="Shape 14"/>
+          <p:cNvSpPr/>
+          <p:nvPr/>
+        </p:nvSpPr>
+        <p:spPr>
+          <a:xfrm>
+            <a:off x="4297680" y="4553712"/>
+            <a:ext cx="182880" cy="182880"/>
+          </a:xfrm>
+          <a:prstGeom prst="roundRect">
+            <a:avLst>
+              <a:gd name="adj" fmla="val 20000"/>
+            </a:avLst>
+          </a:prstGeom>
+          <a:solidFill>
+            <a:srgbClr val="1D9E75"/>
+          </a:solidFill>
+          <a:ln w="12700">
+            <a:solidFill>
+              <a:srgbClr val="1D9E75"/>
+            </a:solidFill>
+            <a:prstDash val="solid"/>
+          </a:ln>
+        </p:spPr>
+      </p:sp>
+      <p:sp>
+        <p:nvSpPr>
+          <p:cNvPr id="19" name="Text 15"/>
+          <p:cNvSpPr txBox="1"/>
+          <p:nvPr/>
+        </p:nvSpPr>
+        <p:spPr>
+          <a:xfrm>
+            <a:off x="4544568" y="4507992"/>
+            <a:ext cx="731520" cy="274320"/>
+          </a:xfrm>
+          <a:prstGeom prst="rect">
+            <a:avLst/>
+          </a:prstGeom>
+          <a:noFill/>
+          <a:ln/>
+        </p:spPr>
+        <p:txBody>
+          <a:bodyPr wrap="square" lIns="0" tIns="0" rIns="0" bIns="0" rtlCol="0" anchor="ctr"/>
+          <a:lstStyle/>
+          <a:p>
+            <a:pPr eaLnBrk="0" latinLnBrk="0" indent="0" marL="0">
+              <a:buNone/>
+            </a:pPr>
+            <a:r>
+              <a:rPr lang="ko-KR" altLang="en-US" sz="1100" dirty="0">
+                <a:solidFill>
+                  <a:srgbClr val="000000"/>
+                </a:solidFill>
+                <a:latin typeface="Malgun Gothic" pitchFamily="34" charset="0"/>
+                <a:ea typeface="Malgun Gothic" pitchFamily="34" charset="-122"/>
+                <a:cs typeface="Malgun Gothic" pitchFamily="34" charset="-120"/>
+              </a:rPr>
+              <a:t>저위험</a:t>
+            </a:r>
+            <a:endParaRPr lang="ko-KR" altLang="en-US" sz="1100" dirty="0"/>
+          </a:p>
+        </p:txBody>
+      </p:sp>
+      <p:sp>
+        <p:nvSpPr>
+          <p:cNvPr id="20" name="Shape 16"/>
+          <p:cNvSpPr/>
+          <p:nvPr/>
+        </p:nvSpPr>
+        <p:spPr>
+          <a:xfrm>
+            <a:off x="5257800" y="4553712"/>
+            <a:ext cx="182880" cy="182880"/>
+          </a:xfrm>
+          <a:prstGeom prst="roundRect">
+            <a:avLst>
+              <a:gd name="adj" fmla="val 20000"/>
+            </a:avLst>
+          </a:prstGeom>
+          <a:solidFill>
+            <a:srgbClr val="E8DCC0"/>
+          </a:solidFill>
+          <a:ln w="12700">
+            <a:solidFill>
+              <a:srgbClr val="E8DCC0"/>
+            </a:solidFill>
+            <a:prstDash val="solid"/>
+          </a:ln>
+        </p:spPr>
+      </p:sp>
+      <p:sp>
+        <p:nvSpPr>
+          <p:cNvPr id="21" name="Text 17"/>
+          <p:cNvSpPr txBox="1"/>
+          <p:nvPr/>
+        </p:nvSpPr>
+        <p:spPr>
+          <a:xfrm>
+            <a:off x="5504688" y="4507992"/>
+            <a:ext cx="731520" cy="274320"/>
+          </a:xfrm>
+          <a:prstGeom prst="rect">
+            <a:avLst/>
+          </a:prstGeom>
+          <a:noFill/>
+          <a:ln/>
+        </p:spPr>
+        <p:txBody>
+          <a:bodyPr wrap="square" lIns="0" tIns="0" rIns="0" bIns="0" rtlCol="0" anchor="ctr"/>
+          <a:lstStyle/>
+          <a:p>
+            <a:pPr eaLnBrk="0" latinLnBrk="0" indent="0" marL="0">
+              <a:buNone/>
+            </a:pPr>
+            <a:r>
+              <a:rPr lang="ko-KR" altLang="en-US" sz="1100" dirty="0">
+                <a:solidFill>
+                  <a:srgbClr val="000000"/>
+                </a:solidFill>
+                <a:latin typeface="Malgun Gothic" pitchFamily="34" charset="0"/>
+                <a:ea typeface="Malgun Gothic" pitchFamily="34" charset="-122"/>
+                <a:cs typeface="Malgun Gothic" pitchFamily="34" charset="-120"/>
+              </a:rPr>
+              <a:t>중간</a:t>
+            </a:r>
+            <a:endParaRPr lang="ko-KR" altLang="en-US" sz="1100" dirty="0"/>
+          </a:p>
+        </p:txBody>
+      </p:sp>
+      <p:sp>
+        <p:nvSpPr>
+          <p:cNvPr id="22" name="Shape 18"/>
+          <p:cNvSpPr/>
+          <p:nvPr/>
+        </p:nvSpPr>
+        <p:spPr>
+          <a:xfrm>
+            <a:off x="6217920" y="4553712"/>
+            <a:ext cx="182880" cy="182880"/>
+          </a:xfrm>
+          <a:prstGeom prst="roundRect">
+            <a:avLst>
+              <a:gd name="adj" fmla="val 20000"/>
+            </a:avLst>
+          </a:prstGeom>
+          <a:solidFill>
+            <a:srgbClr val="F2A93B"/>
+          </a:solidFill>
+          <a:ln w="12700">
+            <a:solidFill>
+              <a:srgbClr val="F2A93B"/>
+            </a:solidFill>
+            <a:prstDash val="solid"/>
+          </a:ln>
+        </p:spPr>
+      </p:sp>
+      <p:sp>
+        <p:nvSpPr>
+          <p:cNvPr id="23" name="Text 19"/>
+          <p:cNvSpPr txBox="1"/>
+          <p:nvPr/>
+        </p:nvSpPr>
+        <p:spPr>
+          <a:xfrm>
+            <a:off x="6464808" y="4507992"/>
+            <a:ext cx="731520" cy="274320"/>
+          </a:xfrm>
+          <a:prstGeom prst="rect">
+            <a:avLst/>
+          </a:prstGeom>
+          <a:noFill/>
+          <a:ln/>
+        </p:spPr>
+        <p:txBody>
+          <a:bodyPr wrap="square" lIns="0" tIns="0" rIns="0" bIns="0" rtlCol="0" anchor="ctr"/>
+          <a:lstStyle/>
+          <a:p>
+            <a:pPr eaLnBrk="0" latinLnBrk="0" indent="0" marL="0">
+              <a:buNone/>
+            </a:pPr>
+            <a:r>
+              <a:rPr lang="ko-KR" altLang="en-US" sz="1100" dirty="0">
+                <a:solidFill>
+                  <a:srgbClr val="000000"/>
+                </a:solidFill>
+                <a:latin typeface="Malgun Gothic" pitchFamily="34" charset="0"/>
+                <a:ea typeface="Malgun Gothic" pitchFamily="34" charset="-122"/>
+                <a:cs typeface="Malgun Gothic" pitchFamily="34" charset="-120"/>
+              </a:rPr>
+              <a:t>고위험</a:t>
+            </a:r>
+            <a:endParaRPr lang="ko-KR" altLang="en-US" sz="1100" dirty="0"/>
+          </a:p>
+        </p:txBody>
+      </p:sp>
+      <p:sp>
+        <p:nvSpPr>
+          <p:cNvPr id="24" name="Text 20"/>
+          <p:cNvSpPr txBox="1"/>
+          <p:nvPr/>
+        </p:nvSpPr>
+        <p:spPr>
+          <a:xfrm>
+            <a:off x="4297680" y="4937760"/>
+            <a:ext cx="2971800" cy="1097280"/>
           </a:xfrm>
           <a:prstGeom prst="rect">
             <a:avLst/>
@@ -6049,7 +6348,7 @@
               <a:buNone/>
             </a:pPr>
             <a:r>
-              <a:rPr lang="ko-KR" altLang="en-US" sz="1100" dirty="0">
+              <a:rPr lang="ko-KR" altLang="en-US" sz="1250" dirty="0">
                 <a:solidFill>
                   <a:srgbClr val="000000"/>
                 </a:solidFill>
@@ -6057,9 +6356,9 @@
                 <a:ea typeface="Malgun Gothic" pitchFamily="34" charset="-122"/>
                 <a:cs typeface="Malgun Gothic" pitchFamily="34" charset="-120"/>
               </a:rPr>
-              <a:t>🟢 저위험  🟡 중간  🟠 고위험</a:t>
-            </a:r>
-            <a:endParaRPr lang="ko-KR" altLang="en-US" sz="1100" dirty="0"/>
+              <a:t>가중치를 6가지로 바꿔도</a:t>
+            </a:r>
+            <a:endParaRPr lang="ko-KR" altLang="en-US" sz="1250" dirty="0"/>
           </a:p>
           <a:p>
             <a:pPr eaLnBrk="0" latinLnBrk="0" indent="0" marL="0">
@@ -6069,7 +6368,7 @@
               <a:buNone/>
             </a:pPr>
             <a:r>
-              <a:rPr lang="ko-KR" altLang="en-US" sz="1100" dirty="0">
+              <a:rPr lang="ko-KR" altLang="en-US" sz="1250" dirty="0">
                 <a:solidFill>
                   <a:srgbClr val="000000"/>
                 </a:solidFill>
@@ -6077,9 +6376,9 @@
                 <a:ea typeface="Malgun Gothic" pitchFamily="34" charset="-122"/>
                 <a:cs typeface="Malgun Gothic" pitchFamily="34" charset="-120"/>
               </a:rPr>
-              <a:t>가중치를 6가지로 바꿔도 오창·오송·옥산은</a:t>
-            </a:r>
-            <a:endParaRPr lang="ko-KR" altLang="en-US" sz="1100" dirty="0"/>
+              <a:t>오창·오송·옥산은 늘 저위험</a:t>
+            </a:r>
+            <a:endParaRPr lang="ko-KR" altLang="en-US" sz="1250" dirty="0"/>
           </a:p>
           <a:p>
             <a:pPr eaLnBrk="0" latinLnBrk="0" indent="0" marL="0">
@@ -6089,7 +6388,7 @@
               <a:buNone/>
             </a:pPr>
             <a:r>
-              <a:rPr lang="ko-KR" altLang="en-US" sz="1100" dirty="0">
+              <a:rPr lang="ko-KR" altLang="en-US" sz="1250" dirty="0">
                 <a:solidFill>
                   <a:srgbClr val="000000"/>
                 </a:solidFill>
@@ -6097,15 +6396,15 @@
                 <a:ea typeface="Malgun Gothic" pitchFamily="34" charset="-122"/>
                 <a:cs typeface="Malgun Gothic" pitchFamily="34" charset="-120"/>
               </a:rPr>
-              <a:t>늘 저위험 (순위 상관 0.92~0.99)</a:t>
-            </a:r>
-            <a:endParaRPr lang="ko-KR" altLang="en-US" sz="1100" dirty="0"/>
-          </a:p>
-        </p:txBody>
-      </p:sp>
-      <p:sp>
-        <p:nvSpPr>
-          <p:cNvPr id="19" name="Shape 15"/>
+              <a:t>(순위 상관 0.92~0.99)</a:t>
+            </a:r>
+            <a:endParaRPr lang="ko-KR" altLang="en-US" sz="1250" dirty="0"/>
+          </a:p>
+        </p:txBody>
+      </p:sp>
+      <p:sp>
+        <p:nvSpPr>
+          <p:cNvPr id="25" name="Shape 21"/>
           <p:cNvSpPr/>
           <p:nvPr/>
         </p:nvSpPr>
@@ -6132,7 +6431,7 @@
       </p:sp>
       <p:graphicFrame>
         <p:nvGraphicFramePr>
-          <p:cNvPr id="20" name="Chart 0" descr=""/>
+          <p:cNvPr id="26" name="Chart 0" descr=""/>
           <p:cNvGraphicFramePr/>
           <p:nvPr/>
         </p:nvGraphicFramePr>
@@ -6148,7 +6447,7 @@
       </p:graphicFrame>
       <p:sp>
         <p:nvSpPr>
-          <p:cNvPr id="21" name="Text 16"/>
+          <p:cNvPr id="27" name="Text 22"/>
           <p:cNvSpPr txBox="1"/>
           <p:nvPr/>
         </p:nvSpPr>
@@ -11568,7 +11867,7 @@
                 <a:ea typeface="Malgun Gothic" pitchFamily="34" charset="-122"/>
                 <a:cs typeface="Malgun Gothic" pitchFamily="34" charset="-120"/>
               </a:rPr>
-              <a:t>시민 63%가 할증 때문에 택시를 포기했다</a:t>
+              <a:t>응답자 63%가 할증 때문에 택시를 포기했다</a:t>
             </a:r>
             <a:endParaRPr lang="ko-KR" altLang="en-US" sz="3000" dirty="0"/>
           </a:p>
@@ -14801,7 +15100,7 @@
                 <a:ea typeface="Malgun Gothic" pitchFamily="34" charset="-122"/>
                 <a:cs typeface="Malgun Gothic" pitchFamily="34" charset="-120"/>
               </a:rPr>
-              <a:t>효과: 손님 할증↓ · 기사 공차↓ 수입↑ · 시 보전 예산↓ · 빈 차 주행·탄소↓</a:t>
+              <a:t>효과: 손님 할증↓ · 기사 수입↑ · 시 예산↓ · 탄소↓</a:t>
             </a:r>
             <a:endParaRPr lang="ko-KR" altLang="en-US" sz="1400" dirty="0"/>
           </a:p>
